--- a/docs/slides/shinro-compass-slides.pptx
+++ b/docs/slides/shinro-compass-slides.pptx
@@ -1417,8 +1417,8 @@
         </p:nvSpPr>
         <p:spPr>
           <a:xfrm>
-            <a:off x="7863840" y="-1280160"/>
-            <a:ext cx="4754880" cy="4754880"/>
+            <a:off x="8138160" y="-1463040"/>
+            <a:ext cx="4937760" cy="4937760"/>
           </a:xfrm>
           <a:prstGeom prst="ellipse">
             <a:avLst/>
@@ -1431,7 +1431,7 @@
           <a:ln w="12700">
             <a:solidFill>
               <a:srgbClr val="C9A85C">
-                <a:alpha val="18000"/>
+                <a:alpha val="16000"/>
               </a:srgbClr>
             </a:solidFill>
             <a:prstDash val="solid"/>
@@ -1446,8 +1446,8 @@
         </p:nvSpPr>
         <p:spPr>
           <a:xfrm>
-            <a:off x="8529523" y="-614477"/>
-            <a:ext cx="3423514" cy="3423514"/>
+            <a:off x="8829446" y="-771754"/>
+            <a:ext cx="3555187" cy="3555187"/>
           </a:xfrm>
           <a:prstGeom prst="ellipse">
             <a:avLst/>
@@ -1460,7 +1460,7 @@
           <a:ln w="12700">
             <a:solidFill>
               <a:srgbClr val="C9A85C">
-                <a:alpha val="18000"/>
+                <a:alpha val="16000"/>
               </a:srgbClr>
             </a:solidFill>
             <a:prstDash val="solid"/>
@@ -1475,8 +1475,8 @@
         </p:nvSpPr>
         <p:spPr>
           <a:xfrm>
-            <a:off x="9052560" y="-91440"/>
-            <a:ext cx="2377440" cy="2377440"/>
+            <a:off x="9372600" y="-228600"/>
+            <a:ext cx="2468880" cy="2468880"/>
           </a:xfrm>
           <a:prstGeom prst="ellipse">
             <a:avLst/>
@@ -1489,7 +1489,7 @@
           <a:ln w="12700">
             <a:solidFill>
               <a:srgbClr val="C9A85C">
-                <a:alpha val="18000"/>
+                <a:alpha val="16000"/>
               </a:srgbClr>
             </a:solidFill>
             <a:prstDash val="solid"/>
@@ -1504,58 +1504,8 @@
         </p:nvSpPr>
         <p:spPr>
           <a:xfrm>
-            <a:off x="7863840" y="1097280"/>
-            <a:ext cx="4754880" cy="0"/>
-          </a:xfrm>
-          <a:prstGeom prst="line">
-            <a:avLst/>
-          </a:prstGeom>
-          <a:noFill/>
-          <a:ln w="9525">
-            <a:solidFill>
-              <a:srgbClr val="C9A85C">
-                <a:alpha val="18000"/>
-              </a:srgbClr>
-            </a:solidFill>
-            <a:prstDash val="solid"/>
-          </a:ln>
-        </p:spPr>
-      </p:sp>
-      <p:sp>
-        <p:nvSpPr>
-          <p:cNvPr id="6" name="Shape 4"/>
-          <p:cNvSpPr/>
-          <p:nvPr/>
-        </p:nvSpPr>
-        <p:spPr>
-          <a:xfrm>
-            <a:off x="10241280" y="-1280160"/>
-            <a:ext cx="0" cy="4754880"/>
-          </a:xfrm>
-          <a:prstGeom prst="line">
-            <a:avLst/>
-          </a:prstGeom>
-          <a:noFill/>
-          <a:ln w="9525">
-            <a:solidFill>
-              <a:srgbClr val="C9A85C">
-                <a:alpha val="18000"/>
-              </a:srgbClr>
-            </a:solidFill>
-            <a:prstDash val="solid"/>
-          </a:ln>
-        </p:spPr>
-      </p:sp>
-      <p:sp>
-        <p:nvSpPr>
-          <p:cNvPr id="7" name="Shape 5"/>
-          <p:cNvSpPr/>
-          <p:nvPr/>
-        </p:nvSpPr>
-        <p:spPr>
-          <a:xfrm>
-            <a:off x="-91440" y="4389120"/>
-            <a:ext cx="3108960" cy="3108960"/>
+            <a:off x="-457200" y="4480560"/>
+            <a:ext cx="3474720" cy="3474720"/>
           </a:xfrm>
           <a:prstGeom prst="ellipse">
             <a:avLst/>
@@ -1568,7 +1518,7 @@
           <a:ln w="12700">
             <a:solidFill>
               <a:srgbClr val="C9A85C">
-                <a:alpha val="14000"/>
+                <a:alpha val="12000"/>
               </a:srgbClr>
             </a:solidFill>
             <a:prstDash val="solid"/>
@@ -1577,14 +1527,14 @@
       </p:sp>
       <p:sp>
         <p:nvSpPr>
-          <p:cNvPr id="8" name="Shape 6"/>
-          <p:cNvSpPr/>
-          <p:nvPr/>
-        </p:nvSpPr>
-        <p:spPr>
-          <a:xfrm>
-            <a:off x="343814" y="4824374"/>
-            <a:ext cx="2238451" cy="2238451"/>
+          <p:cNvPr id="6" name="Shape 4"/>
+          <p:cNvSpPr/>
+          <p:nvPr/>
+        </p:nvSpPr>
+        <p:spPr>
+          <a:xfrm>
+            <a:off x="29261" y="4967021"/>
+            <a:ext cx="2501798" cy="2501798"/>
           </a:xfrm>
           <a:prstGeom prst="ellipse">
             <a:avLst/>
@@ -1597,7 +1547,7 @@
           <a:ln w="12700">
             <a:solidFill>
               <a:srgbClr val="C9A85C">
-                <a:alpha val="14000"/>
+                <a:alpha val="12000"/>
               </a:srgbClr>
             </a:solidFill>
             <a:prstDash val="solid"/>
@@ -1606,14 +1556,14 @@
       </p:sp>
       <p:sp>
         <p:nvSpPr>
-          <p:cNvPr id="9" name="Shape 7"/>
-          <p:cNvSpPr/>
-          <p:nvPr/>
-        </p:nvSpPr>
-        <p:spPr>
-          <a:xfrm>
-            <a:off x="685800" y="5166360"/>
-            <a:ext cx="1554480" cy="1554480"/>
+          <p:cNvPr id="7" name="Shape 5"/>
+          <p:cNvSpPr/>
+          <p:nvPr/>
+        </p:nvSpPr>
+        <p:spPr>
+          <a:xfrm>
+            <a:off x="411480" y="5349240"/>
+            <a:ext cx="1737360" cy="1737360"/>
           </a:xfrm>
           <a:prstGeom prst="ellipse">
             <a:avLst/>
@@ -1626,7 +1576,7 @@
           <a:ln w="12700">
             <a:solidFill>
               <a:srgbClr val="C9A85C">
-                <a:alpha val="14000"/>
+                <a:alpha val="12000"/>
               </a:srgbClr>
             </a:solidFill>
             <a:prstDash val="solid"/>
@@ -1635,63 +1585,13 @@
       </p:sp>
       <p:sp>
         <p:nvSpPr>
-          <p:cNvPr id="10" name="Shape 8"/>
-          <p:cNvSpPr/>
-          <p:nvPr/>
-        </p:nvSpPr>
-        <p:spPr>
-          <a:xfrm>
-            <a:off x="-91440" y="5943600"/>
-            <a:ext cx="3108960" cy="0"/>
-          </a:xfrm>
-          <a:prstGeom prst="line">
-            <a:avLst/>
-          </a:prstGeom>
-          <a:noFill/>
-          <a:ln w="9525">
-            <a:solidFill>
-              <a:srgbClr val="C9A85C">
-                <a:alpha val="14000"/>
-              </a:srgbClr>
-            </a:solidFill>
-            <a:prstDash val="solid"/>
-          </a:ln>
-        </p:spPr>
-      </p:sp>
-      <p:sp>
-        <p:nvSpPr>
-          <p:cNvPr id="11" name="Shape 9"/>
-          <p:cNvSpPr/>
-          <p:nvPr/>
-        </p:nvSpPr>
-        <p:spPr>
-          <a:xfrm>
-            <a:off x="1463040" y="4389120"/>
-            <a:ext cx="0" cy="3108960"/>
-          </a:xfrm>
-          <a:prstGeom prst="line">
-            <a:avLst/>
-          </a:prstGeom>
-          <a:noFill/>
-          <a:ln w="9525">
-            <a:solidFill>
-              <a:srgbClr val="C9A85C">
-                <a:alpha val="14000"/>
-              </a:srgbClr>
-            </a:solidFill>
-            <a:prstDash val="solid"/>
-          </a:ln>
-        </p:spPr>
-      </p:sp>
-      <p:sp>
-        <p:nvSpPr>
-          <p:cNvPr id="12" name="Shape 10"/>
-          <p:cNvSpPr/>
-          <p:nvPr/>
-        </p:nvSpPr>
-        <p:spPr>
-          <a:xfrm>
-            <a:off x="5710428" y="1170432"/>
+          <p:cNvPr id="8" name="Shape 6"/>
+          <p:cNvSpPr/>
+          <p:nvPr/>
+        </p:nvSpPr>
+        <p:spPr>
+          <a:xfrm>
+            <a:off x="5710428" y="1188720"/>
             <a:ext cx="768096" cy="768096"/>
           </a:xfrm>
           <a:prstGeom prst="ellipse">
@@ -1712,163 +1612,163 @@
       </p:sp>
       <p:sp>
         <p:nvSpPr>
+          <p:cNvPr id="9" name="Text 7"/>
+          <p:cNvSpPr/>
+          <p:nvPr/>
+        </p:nvSpPr>
+        <p:spPr>
+          <a:xfrm>
+            <a:off x="5710428" y="1188720"/>
+            <a:ext cx="768096" cy="768096"/>
+          </a:xfrm>
+          <a:prstGeom prst="rect">
+            <a:avLst/>
+          </a:prstGeom>
+          <a:noFill/>
+          <a:ln/>
+        </p:spPr>
+        <p:txBody>
+          <a:bodyPr wrap="square" lIns="0" tIns="0" rIns="0" bIns="0" rtlCol="0" anchor="ctr"/>
+          <a:lstStyle/>
+          <a:p>
+            <a:pPr algn="ctr" indent="0" marL="0">
+              <a:buNone/>
+            </a:pPr>
+            <a:r>
+              <a:rPr lang="en-US" sz="2000" b="1" dirty="0">
+                <a:solidFill>
+                  <a:srgbClr val="C9A85C"/>
+                </a:solidFill>
+                <a:latin typeface="Yu Gothic" pitchFamily="34" charset="0"/>
+                <a:ea typeface="Yu Gothic" pitchFamily="34" charset="-122"/>
+                <a:cs typeface="Yu Gothic" pitchFamily="34" charset="-120"/>
+              </a:rPr>
+              <a:t>N</a:t>
+            </a:r>
+            <a:endParaRPr lang="en-US" sz="2000" dirty="0"/>
+          </a:p>
+        </p:txBody>
+      </p:sp>
+      <p:sp>
+        <p:nvSpPr>
+          <p:cNvPr id="10" name="Text 8"/>
+          <p:cNvSpPr/>
+          <p:nvPr/>
+        </p:nvSpPr>
+        <p:spPr>
+          <a:xfrm>
+            <a:off x="0" y="2240280"/>
+            <a:ext cx="12188952" cy="1051560"/>
+          </a:xfrm>
+          <a:prstGeom prst="rect">
+            <a:avLst/>
+          </a:prstGeom>
+          <a:noFill/>
+          <a:ln/>
+        </p:spPr>
+        <p:txBody>
+          <a:bodyPr wrap="square" lIns="0" tIns="0" rIns="0" bIns="0" rtlCol="0" anchor="ctr"/>
+          <a:lstStyle/>
+          <a:p>
+            <a:pPr algn="ctr" indent="0" marL="0">
+              <a:buNone/>
+            </a:pPr>
+            <a:r>
+              <a:rPr lang="en-US" sz="5400" b="1" dirty="0">
+                <a:solidFill>
+                  <a:srgbClr val="F2F5FA"/>
+                </a:solidFill>
+                <a:latin typeface="Yu Gothic" pitchFamily="34" charset="0"/>
+                <a:ea typeface="Yu Gothic" pitchFamily="34" charset="-122"/>
+                <a:cs typeface="Yu Gothic" pitchFamily="34" charset="-120"/>
+              </a:rPr>
+              <a:t>進路コンパス</a:t>
+            </a:r>
+            <a:endParaRPr lang="en-US" sz="5400" dirty="0"/>
+          </a:p>
+        </p:txBody>
+      </p:sp>
+      <p:sp>
+        <p:nvSpPr>
+          <p:cNvPr id="11" name="Text 9"/>
+          <p:cNvSpPr/>
+          <p:nvPr/>
+        </p:nvSpPr>
+        <p:spPr>
+          <a:xfrm>
+            <a:off x="0" y="3401568"/>
+            <a:ext cx="12188952" cy="548640"/>
+          </a:xfrm>
+          <a:prstGeom prst="rect">
+            <a:avLst/>
+          </a:prstGeom>
+          <a:noFill/>
+          <a:ln/>
+        </p:spPr>
+        <p:txBody>
+          <a:bodyPr wrap="square" lIns="0" tIns="0" rIns="0" bIns="0" rtlCol="0" anchor="ctr"/>
+          <a:lstStyle/>
+          <a:p>
+            <a:pPr algn="ctr" indent="0" marL="0">
+              <a:buNone/>
+            </a:pPr>
+            <a:r>
+              <a:rPr lang="en-US" sz="2400" dirty="0">
+                <a:solidFill>
+                  <a:srgbClr val="C9A85C"/>
+                </a:solidFill>
+                <a:latin typeface="Yu Gothic" pitchFamily="34" charset="0"/>
+                <a:ea typeface="Yu Gothic" pitchFamily="34" charset="-122"/>
+                <a:cs typeface="Yu Gothic" pitchFamily="34" charset="-120"/>
+              </a:rPr>
+              <a:t>都立高校選びの、はじめの一歩を。</a:t>
+            </a:r>
+            <a:endParaRPr lang="en-US" sz="2400" dirty="0"/>
+          </a:p>
+        </p:txBody>
+      </p:sp>
+      <p:sp>
+        <p:nvSpPr>
+          <p:cNvPr id="12" name="Text 10"/>
+          <p:cNvSpPr/>
+          <p:nvPr/>
+        </p:nvSpPr>
+        <p:spPr>
+          <a:xfrm>
+            <a:off x="0" y="4059936"/>
+            <a:ext cx="12188952" cy="457200"/>
+          </a:xfrm>
+          <a:prstGeom prst="rect">
+            <a:avLst/>
+          </a:prstGeom>
+          <a:noFill/>
+          <a:ln/>
+        </p:spPr>
+        <p:txBody>
+          <a:bodyPr wrap="square" lIns="0" tIns="0" rIns="0" bIns="0" rtlCol="0" anchor="ctr"/>
+          <a:lstStyle/>
+          <a:p>
+            <a:pPr algn="ctr" indent="0" marL="0">
+              <a:buNone/>
+            </a:pPr>
+            <a:r>
+              <a:rPr lang="en-US" sz="1500" dirty="0">
+                <a:solidFill>
+                  <a:srgbClr val="8B97AC"/>
+                </a:solidFill>
+                <a:latin typeface="Yu Gothic" pitchFamily="34" charset="0"/>
+                <a:ea typeface="Yu Gothic" pitchFamily="34" charset="-122"/>
+                <a:cs typeface="Yu Gothic" pitchFamily="34" charset="-120"/>
+              </a:rPr>
+              <a:t>塾に通っていなくても、ここから始められる。</a:t>
+            </a:r>
+            <a:endParaRPr lang="en-US" sz="1500" dirty="0"/>
+          </a:p>
+        </p:txBody>
+      </p:sp>
+      <p:sp>
+        <p:nvSpPr>
           <p:cNvPr id="13" name="Text 11"/>
-          <p:cNvSpPr/>
-          <p:nvPr/>
-        </p:nvSpPr>
-        <p:spPr>
-          <a:xfrm>
-            <a:off x="5710428" y="1170432"/>
-            <a:ext cx="768096" cy="768096"/>
-          </a:xfrm>
-          <a:prstGeom prst="rect">
-            <a:avLst/>
-          </a:prstGeom>
-          <a:noFill/>
-          <a:ln/>
-        </p:spPr>
-        <p:txBody>
-          <a:bodyPr wrap="square" lIns="0" tIns="0" rIns="0" bIns="0" rtlCol="0" anchor="ctr"/>
-          <a:lstStyle/>
-          <a:p>
-            <a:pPr algn="ctr" indent="0" marL="0">
-              <a:buNone/>
-            </a:pPr>
-            <a:r>
-              <a:rPr lang="en-US" sz="2000" b="1" dirty="0">
-                <a:solidFill>
-                  <a:srgbClr val="C9A85C"/>
-                </a:solidFill>
-                <a:latin typeface="Yu Gothic" pitchFamily="34" charset="0"/>
-                <a:ea typeface="Yu Gothic" pitchFamily="34" charset="-122"/>
-                <a:cs typeface="Yu Gothic" pitchFamily="34" charset="-120"/>
-              </a:rPr>
-              <a:t>N</a:t>
-            </a:r>
-            <a:endParaRPr lang="en-US" sz="2000" dirty="0"/>
-          </a:p>
-        </p:txBody>
-      </p:sp>
-      <p:sp>
-        <p:nvSpPr>
-          <p:cNvPr id="14" name="Text 12"/>
-          <p:cNvSpPr/>
-          <p:nvPr/>
-        </p:nvSpPr>
-        <p:spPr>
-          <a:xfrm>
-            <a:off x="0" y="2286000"/>
-            <a:ext cx="12188952" cy="1051560"/>
-          </a:xfrm>
-          <a:prstGeom prst="rect">
-            <a:avLst/>
-          </a:prstGeom>
-          <a:noFill/>
-          <a:ln/>
-        </p:spPr>
-        <p:txBody>
-          <a:bodyPr wrap="square" lIns="0" tIns="0" rIns="0" bIns="0" rtlCol="0" anchor="ctr"/>
-          <a:lstStyle/>
-          <a:p>
-            <a:pPr algn="ctr" indent="0" marL="0">
-              <a:buNone/>
-            </a:pPr>
-            <a:r>
-              <a:rPr lang="en-US" sz="5400" b="1" dirty="0">
-                <a:solidFill>
-                  <a:srgbClr val="F2F5FA"/>
-                </a:solidFill>
-                <a:latin typeface="Yu Gothic" pitchFamily="34" charset="0"/>
-                <a:ea typeface="Yu Gothic" pitchFamily="34" charset="-122"/>
-                <a:cs typeface="Yu Gothic" pitchFamily="34" charset="-120"/>
-              </a:rPr>
-              <a:t>進路コンパス</a:t>
-            </a:r>
-            <a:endParaRPr lang="en-US" sz="5400" dirty="0"/>
-          </a:p>
-        </p:txBody>
-      </p:sp>
-      <p:sp>
-        <p:nvSpPr>
-          <p:cNvPr id="15" name="Text 13"/>
-          <p:cNvSpPr/>
-          <p:nvPr/>
-        </p:nvSpPr>
-        <p:spPr>
-          <a:xfrm>
-            <a:off x="0" y="3429000"/>
-            <a:ext cx="12188952" cy="548640"/>
-          </a:xfrm>
-          <a:prstGeom prst="rect">
-            <a:avLst/>
-          </a:prstGeom>
-          <a:noFill/>
-          <a:ln/>
-        </p:spPr>
-        <p:txBody>
-          <a:bodyPr wrap="square" lIns="0" tIns="0" rIns="0" bIns="0" rtlCol="0" anchor="ctr"/>
-          <a:lstStyle/>
-          <a:p>
-            <a:pPr algn="ctr" indent="0" marL="0">
-              <a:buNone/>
-            </a:pPr>
-            <a:r>
-              <a:rPr lang="en-US" sz="2200" dirty="0">
-                <a:solidFill>
-                  <a:srgbClr val="C9A85C"/>
-                </a:solidFill>
-                <a:latin typeface="Yu Gothic" pitchFamily="34" charset="0"/>
-                <a:ea typeface="Yu Gothic" pitchFamily="34" charset="-122"/>
-                <a:cs typeface="Yu Gothic" pitchFamily="34" charset="-120"/>
-              </a:rPr>
-              <a:t>会話で見つける、わが子に合う都立高校</a:t>
-            </a:r>
-            <a:endParaRPr lang="en-US" sz="2200" dirty="0"/>
-          </a:p>
-        </p:txBody>
-      </p:sp>
-      <p:sp>
-        <p:nvSpPr>
-          <p:cNvPr id="16" name="Text 14"/>
-          <p:cNvSpPr/>
-          <p:nvPr/>
-        </p:nvSpPr>
-        <p:spPr>
-          <a:xfrm>
-            <a:off x="0" y="4069080"/>
-            <a:ext cx="12188952" cy="457200"/>
-          </a:xfrm>
-          <a:prstGeom prst="rect">
-            <a:avLst/>
-          </a:prstGeom>
-          <a:noFill/>
-          <a:ln/>
-        </p:spPr>
-        <p:txBody>
-          <a:bodyPr wrap="square" lIns="0" tIns="0" rIns="0" bIns="0" rtlCol="0" anchor="ctr"/>
-          <a:lstStyle/>
-          <a:p>
-            <a:pPr algn="ctr" indent="0" marL="0">
-              <a:buNone/>
-            </a:pPr>
-            <a:r>
-              <a:rPr lang="en-US" sz="1500" dirty="0">
-                <a:solidFill>
-                  <a:srgbClr val="8B97AC"/>
-                </a:solidFill>
-                <a:latin typeface="Yu Gothic" pitchFamily="34" charset="0"/>
-                <a:ea typeface="Yu Gothic" pitchFamily="34" charset="-122"/>
-                <a:cs typeface="Yu Gothic" pitchFamily="34" charset="-120"/>
-              </a:rPr>
-              <a:t>塾のような志望校選びを、どの家庭にも。</a:t>
-            </a:r>
-            <a:endParaRPr lang="en-US" sz="1500" dirty="0"/>
-          </a:p>
-        </p:txBody>
-      </p:sp>
-      <p:sp>
-        <p:nvSpPr>
-          <p:cNvPr id="17" name="Text 15"/>
           <p:cNvSpPr/>
           <p:nvPr/>
         </p:nvSpPr>
@@ -1921,7 +1821,7 @@
       </p:sp>
       <p:sp>
         <p:nvSpPr>
-          <p:cNvPr id="18" name="Text 16"/>
+          <p:cNvPr id="14" name="Text 12"/>
           <p:cNvSpPr/>
           <p:nvPr/>
         </p:nvSpPr>
@@ -1998,8 +1898,8 @@
         </p:nvSpPr>
         <p:spPr>
           <a:xfrm>
-            <a:off x="640080" y="502920"/>
-            <a:ext cx="10972800" cy="731520"/>
+            <a:off x="640080" y="457200"/>
+            <a:ext cx="10972800" cy="777240"/>
           </a:xfrm>
           <a:prstGeom prst="rect">
             <a:avLst/>
@@ -2023,7 +1923,7 @@
                 <a:ea typeface="Yu Gothic" pitchFamily="34" charset="-122"/>
                 <a:cs typeface="Yu Gothic" pitchFamily="34" charset="-120"/>
               </a:rPr>
-              <a:t>都立高校選びは、情報集めがしんどい</a:t>
+              <a:t>どこから見ればいいか、分からない</a:t>
             </a:r>
             <a:endParaRPr lang="en-US" sz="3200" dirty="0"/>
           </a:p>
@@ -2031,18 +1931,96 @@
       </p:sp>
       <p:sp>
         <p:nvSpPr>
-          <p:cNvPr id="3" name="Shape 1"/>
-          <p:cNvSpPr/>
-          <p:nvPr/>
-        </p:nvSpPr>
-        <p:spPr>
-          <a:xfrm>
-            <a:off x="640080" y="1600200"/>
-            <a:ext cx="3383280" cy="2286000"/>
+          <p:cNvPr id="3" name="Text 1"/>
+          <p:cNvSpPr/>
+          <p:nvPr/>
+        </p:nvSpPr>
+        <p:spPr>
+          <a:xfrm>
+            <a:off x="640080" y="1371600"/>
+            <a:ext cx="10972800" cy="411480"/>
+          </a:xfrm>
+          <a:prstGeom prst="rect">
+            <a:avLst/>
+          </a:prstGeom>
+          <a:noFill/>
+          <a:ln/>
+        </p:spPr>
+        <p:txBody>
+          <a:bodyPr wrap="square" lIns="0" tIns="0" rIns="0" bIns="0" rtlCol="0" anchor="ctr"/>
+          <a:lstStyle/>
+          <a:p>
+            <a:pPr indent="0" marL="0">
+              <a:buNone/>
+            </a:pPr>
+            <a:r>
+              <a:rPr lang="en-US" sz="1700" dirty="0">
+                <a:solidFill>
+                  <a:srgbClr val="5C6B84"/>
+                </a:solidFill>
+                <a:latin typeface="Yu Gothic" pitchFamily="34" charset="0"/>
+                <a:ea typeface="Yu Gothic" pitchFamily="34" charset="-122"/>
+                <a:cs typeface="Yu Gothic" pitchFamily="34" charset="-120"/>
+              </a:rPr>
+              <a:t>都立高校は189校。学校のサイトも、倍率の表も、公開されています。</a:t>
+            </a:r>
+            <a:endParaRPr lang="en-US" sz="1700" dirty="0"/>
+          </a:p>
+        </p:txBody>
+      </p:sp>
+      <p:sp>
+        <p:nvSpPr>
+          <p:cNvPr id="4" name="Text 2"/>
+          <p:cNvSpPr/>
+          <p:nvPr/>
+        </p:nvSpPr>
+        <p:spPr>
+          <a:xfrm>
+            <a:off x="640080" y="1828800"/>
+            <a:ext cx="10972800" cy="411480"/>
+          </a:xfrm>
+          <a:prstGeom prst="rect">
+            <a:avLst/>
+          </a:prstGeom>
+          <a:noFill/>
+          <a:ln/>
+        </p:spPr>
+        <p:txBody>
+          <a:bodyPr wrap="square" lIns="0" tIns="0" rIns="0" bIns="0" rtlCol="0" anchor="ctr"/>
+          <a:lstStyle/>
+          <a:p>
+            <a:pPr indent="0" marL="0">
+              <a:buNone/>
+            </a:pPr>
+            <a:r>
+              <a:rPr lang="en-US" sz="1700" dirty="0">
+                <a:solidFill>
+                  <a:srgbClr val="5C6B84"/>
+                </a:solidFill>
+                <a:latin typeface="Yu Gothic" pitchFamily="34" charset="0"/>
+                <a:ea typeface="Yu Gothic" pitchFamily="34" charset="-122"/>
+                <a:cs typeface="Yu Gothic" pitchFamily="34" charset="-120"/>
+              </a:rPr>
+              <a:t>それでも保護者が最初に知りたいのは「189校の一覧」ではありません。</a:t>
+            </a:r>
+            <a:endParaRPr lang="en-US" sz="1700" dirty="0"/>
+          </a:p>
+        </p:txBody>
+      </p:sp>
+      <p:sp>
+        <p:nvSpPr>
+          <p:cNvPr id="5" name="Shape 3"/>
+          <p:cNvSpPr/>
+          <p:nvPr/>
+        </p:nvSpPr>
+        <p:spPr>
+          <a:xfrm>
+            <a:off x="640080" y="2514600"/>
+            <a:ext cx="5257800" cy="1828800"/>
           </a:xfrm>
           <a:prstGeom prst="roundRect">
             <a:avLst>
-              <a:gd name="adj" fmla="val 4800"/>
+              <a:gd name="adj" fmla="val 6000"/>
             </a:avLst>
           </a:prstGeom>
           <a:solidFill>
@@ -2057,7 +2035,7 @@
           <a:effectLst>
             <a:outerShdw sx="100000" sy="100000" kx="0" ky="0" algn="bl" rotWithShape="0" blurRad="101600" dist="38100" dir="5400000">
               <a:srgbClr val="1A2333">
-                <a:alpha val="12000"/>
+                <a:alpha val="10000"/>
               </a:srgbClr>
             </a:outerShdw>
           </a:effectLst>
@@ -2065,30 +2043,30 @@
       </p:sp>
       <p:sp>
         <p:nvSpPr>
-          <p:cNvPr id="4" name="Text 2"/>
-          <p:cNvSpPr/>
-          <p:nvPr/>
-        </p:nvSpPr>
-        <p:spPr>
-          <a:xfrm>
-            <a:off x="640080" y="1874520"/>
-            <a:ext cx="3383280" cy="914400"/>
-          </a:xfrm>
-          <a:prstGeom prst="rect">
-            <a:avLst/>
-          </a:prstGeom>
-          <a:noFill/>
-          <a:ln/>
-        </p:spPr>
-        <p:txBody>
-          <a:bodyPr wrap="square" lIns="0" tIns="0" rIns="0" bIns="0" rtlCol="0" anchor="ctr"/>
-          <a:lstStyle/>
-          <a:p>
-            <a:pPr algn="ctr" indent="0" marL="0">
-              <a:buNone/>
-            </a:pPr>
-            <a:r>
-              <a:rPr lang="en-US" sz="4400" b="1" dirty="0">
+          <p:cNvPr id="6" name="Text 4"/>
+          <p:cNvSpPr/>
+          <p:nvPr/>
+        </p:nvSpPr>
+        <p:spPr>
+          <a:xfrm>
+            <a:off x="960120" y="2724912"/>
+            <a:ext cx="4617720" cy="411480"/>
+          </a:xfrm>
+          <a:prstGeom prst="rect">
+            <a:avLst/>
+          </a:prstGeom>
+          <a:noFill/>
+          <a:ln/>
+        </p:spPr>
+        <p:txBody>
+          <a:bodyPr wrap="square" lIns="0" tIns="0" rIns="0" bIns="0" rtlCol="0" anchor="ctr"/>
+          <a:lstStyle/>
+          <a:p>
+            <a:pPr indent="0" marL="0">
+              <a:buNone/>
+            </a:pPr>
+            <a:r>
+              <a:rPr lang="en-US" sz="1900" b="1" dirty="0">
                 <a:solidFill>
                   <a:srgbClr val="33527E"/>
                 </a:solidFill>
@@ -2096,38 +2074,38 @@
                 <a:ea typeface="Yu Gothic" pitchFamily="34" charset="-122"/>
                 <a:cs typeface="Yu Gothic" pitchFamily="34" charset="-120"/>
               </a:rPr>
-              <a:t>189校</a:t>
-            </a:r>
-            <a:endParaRPr lang="en-US" sz="4400" dirty="0"/>
-          </a:p>
-        </p:txBody>
-      </p:sp>
-      <p:sp>
-        <p:nvSpPr>
-          <p:cNvPr id="5" name="Text 3"/>
-          <p:cNvSpPr/>
-          <p:nvPr/>
-        </p:nvSpPr>
-        <p:spPr>
-          <a:xfrm>
-            <a:off x="868680" y="2834640"/>
-            <a:ext cx="2926080" cy="914400"/>
-          </a:xfrm>
-          <a:prstGeom prst="rect">
-            <a:avLst/>
-          </a:prstGeom>
-          <a:noFill/>
-          <a:ln/>
-        </p:spPr>
-        <p:txBody>
-          <a:bodyPr wrap="square" lIns="0" tIns="0" rIns="0" bIns="0" rtlCol="0" anchor="ctr"/>
-          <a:lstStyle/>
-          <a:p>
-            <a:pPr algn="ctr" indent="0" marL="0">
-              <a:buNone/>
-            </a:pPr>
-            <a:r>
-              <a:rPr lang="en-US" sz="1250" dirty="0">
+              <a:t>塾に通う家庭</a:t>
+            </a:r>
+            <a:endParaRPr lang="en-US" sz="1900" dirty="0"/>
+          </a:p>
+        </p:txBody>
+      </p:sp>
+      <p:sp>
+        <p:nvSpPr>
+          <p:cNvPr id="7" name="Text 5"/>
+          <p:cNvSpPr/>
+          <p:nvPr/>
+        </p:nvSpPr>
+        <p:spPr>
+          <a:xfrm>
+            <a:off x="960120" y="3200400"/>
+            <a:ext cx="4617720" cy="1005840"/>
+          </a:xfrm>
+          <a:prstGeom prst="rect">
+            <a:avLst/>
+          </a:prstGeom>
+          <a:noFill/>
+          <a:ln/>
+        </p:spPr>
+        <p:txBody>
+          <a:bodyPr wrap="square" lIns="0" tIns="0" rIns="0" bIns="0" rtlCol="0" anchor="ctr"/>
+          <a:lstStyle/>
+          <a:p>
+            <a:pPr indent="0" marL="0">
+              <a:buNone/>
+            </a:pPr>
+            <a:r>
+              <a:rPr lang="en-US" sz="1450" dirty="0">
                 <a:solidFill>
                   <a:srgbClr val="5C6B84"/>
                 </a:solidFill>
@@ -2135,16 +2113,16 @@
                 <a:ea typeface="Yu Gothic" pitchFamily="34" charset="-122"/>
                 <a:cs typeface="Yu Gothic" pitchFamily="34" charset="-120"/>
               </a:rPr>
-              <a:t>都立高校＋高専。名前を全部</a:t>
-            </a:r>
-            <a:endParaRPr lang="en-US" sz="1250" dirty="0"/>
-          </a:p>
-          <a:p>
-            <a:pPr algn="ctr" indent="0" marL="0">
-              <a:buNone/>
-            </a:pPr>
-            <a:r>
-              <a:rPr lang="en-US" sz="1250" dirty="0">
+              <a:t>面談で、うちの子ならこの数校から、と</a:t>
+            </a:r>
+            <a:endParaRPr lang="en-US" sz="1450" dirty="0"/>
+          </a:p>
+          <a:p>
+            <a:pPr indent="0" marL="0">
+              <a:buNone/>
+            </a:pPr>
+            <a:r>
+              <a:rPr lang="en-US" sz="1450" dirty="0">
                 <a:solidFill>
                   <a:srgbClr val="5C6B84"/>
                 </a:solidFill>
@@ -2152,26 +2130,26 @@
                 <a:ea typeface="Yu Gothic" pitchFamily="34" charset="-122"/>
                 <a:cs typeface="Yu Gothic" pitchFamily="34" charset="-120"/>
               </a:rPr>
-              <a:t>言える保護者はいない</a:t>
-            </a:r>
-            <a:endParaRPr lang="en-US" sz="1250" dirty="0"/>
-          </a:p>
-        </p:txBody>
-      </p:sp>
-      <p:sp>
-        <p:nvSpPr>
-          <p:cNvPr id="6" name="Shape 4"/>
-          <p:cNvSpPr/>
-          <p:nvPr/>
-        </p:nvSpPr>
-        <p:spPr>
-          <a:xfrm>
-            <a:off x="4389120" y="1600200"/>
-            <a:ext cx="3383280" cy="2286000"/>
+              <a:t>一緒に見当をつけてくれる先生がいる。</a:t>
+            </a:r>
+            <a:endParaRPr lang="en-US" sz="1450" dirty="0"/>
+          </a:p>
+        </p:txBody>
+      </p:sp>
+      <p:sp>
+        <p:nvSpPr>
+          <p:cNvPr id="8" name="Shape 6"/>
+          <p:cNvSpPr/>
+          <p:nvPr/>
+        </p:nvSpPr>
+        <p:spPr>
+          <a:xfrm>
+            <a:off x="6263640" y="2514600"/>
+            <a:ext cx="5257800" cy="1828800"/>
           </a:xfrm>
           <a:prstGeom prst="roundRect">
             <a:avLst>
-              <a:gd name="adj" fmla="val 4800"/>
+              <a:gd name="adj" fmla="val 6000"/>
             </a:avLst>
           </a:prstGeom>
           <a:solidFill>
@@ -2186,7 +2164,7 @@
           <a:effectLst>
             <a:outerShdw sx="100000" sy="100000" kx="0" ky="0" algn="bl" rotWithShape="0" blurRad="101600" dist="38100" dir="5400000">
               <a:srgbClr val="1A2333">
-                <a:alpha val="12000"/>
+                <a:alpha val="10000"/>
               </a:srgbClr>
             </a:outerShdw>
           </a:effectLst>
@@ -2194,69 +2172,69 @@
       </p:sp>
       <p:sp>
         <p:nvSpPr>
-          <p:cNvPr id="7" name="Text 5"/>
-          <p:cNvSpPr/>
-          <p:nvPr/>
-        </p:nvSpPr>
-        <p:spPr>
-          <a:xfrm>
-            <a:off x="4389120" y="1874520"/>
-            <a:ext cx="3383280" cy="914400"/>
-          </a:xfrm>
-          <a:prstGeom prst="rect">
-            <a:avLst/>
-          </a:prstGeom>
-          <a:noFill/>
-          <a:ln/>
-        </p:spPr>
-        <p:txBody>
-          <a:bodyPr wrap="square" lIns="0" tIns="0" rIns="0" bIns="0" rtlCol="0" anchor="ctr"/>
-          <a:lstStyle/>
-          <a:p>
-            <a:pPr algn="ctr" indent="0" marL="0">
-              <a:buNone/>
-            </a:pPr>
-            <a:r>
-              <a:rPr lang="en-US" sz="4400" b="1" dirty="0">
-                <a:solidFill>
-                  <a:srgbClr val="33527E"/>
-                </a:solidFill>
-                <a:latin typeface="Yu Gothic" pitchFamily="34" charset="0"/>
-                <a:ea typeface="Yu Gothic" pitchFamily="34" charset="-122"/>
-                <a:cs typeface="Yu Gothic" pitchFamily="34" charset="-120"/>
-              </a:rPr>
-              <a:t>7つ以上</a:t>
-            </a:r>
-            <a:endParaRPr lang="en-US" sz="4400" dirty="0"/>
-          </a:p>
-        </p:txBody>
-      </p:sp>
-      <p:sp>
-        <p:nvSpPr>
-          <p:cNvPr id="8" name="Text 6"/>
-          <p:cNvSpPr/>
-          <p:nvPr/>
-        </p:nvSpPr>
-        <p:spPr>
-          <a:xfrm>
-            <a:off x="4617720" y="2834640"/>
-            <a:ext cx="2926080" cy="914400"/>
-          </a:xfrm>
-          <a:prstGeom prst="rect">
-            <a:avLst/>
-          </a:prstGeom>
-          <a:noFill/>
-          <a:ln/>
-        </p:spPr>
-        <p:txBody>
-          <a:bodyPr wrap="square" lIns="0" tIns="0" rIns="0" bIns="0" rtlCol="0" anchor="ctr"/>
-          <a:lstStyle/>
-          <a:p>
-            <a:pPr algn="ctr" indent="0" marL="0">
-              <a:buNone/>
-            </a:pPr>
-            <a:r>
-              <a:rPr lang="en-US" sz="1250" dirty="0">
+          <p:cNvPr id="9" name="Text 7"/>
+          <p:cNvSpPr/>
+          <p:nvPr/>
+        </p:nvSpPr>
+        <p:spPr>
+          <a:xfrm>
+            <a:off x="6583680" y="2724912"/>
+            <a:ext cx="4617720" cy="411480"/>
+          </a:xfrm>
+          <a:prstGeom prst="rect">
+            <a:avLst/>
+          </a:prstGeom>
+          <a:noFill/>
+          <a:ln/>
+        </p:spPr>
+        <p:txBody>
+          <a:bodyPr wrap="square" lIns="0" tIns="0" rIns="0" bIns="0" rtlCol="0" anchor="ctr"/>
+          <a:lstStyle/>
+          <a:p>
+            <a:pPr indent="0" marL="0">
+              <a:buNone/>
+            </a:pPr>
+            <a:r>
+              <a:rPr lang="en-US" sz="1900" b="1" dirty="0">
+                <a:solidFill>
+                  <a:srgbClr val="A87F2F"/>
+                </a:solidFill>
+                <a:latin typeface="Yu Gothic" pitchFamily="34" charset="0"/>
+                <a:ea typeface="Yu Gothic" pitchFamily="34" charset="-122"/>
+                <a:cs typeface="Yu Gothic" pitchFamily="34" charset="-120"/>
+              </a:rPr>
+              <a:t>通っていない家庭</a:t>
+            </a:r>
+            <a:endParaRPr lang="en-US" sz="1900" dirty="0"/>
+          </a:p>
+        </p:txBody>
+      </p:sp>
+      <p:sp>
+        <p:nvSpPr>
+          <p:cNvPr id="10" name="Text 8"/>
+          <p:cNvSpPr/>
+          <p:nvPr/>
+        </p:nvSpPr>
+        <p:spPr>
+          <a:xfrm>
+            <a:off x="6583680" y="3200400"/>
+            <a:ext cx="4617720" cy="1005840"/>
+          </a:xfrm>
+          <a:prstGeom prst="rect">
+            <a:avLst/>
+          </a:prstGeom>
+          <a:noFill/>
+          <a:ln/>
+        </p:spPr>
+        <p:txBody>
+          <a:bodyPr wrap="square" lIns="0" tIns="0" rIns="0" bIns="0" rtlCol="0" anchor="ctr"/>
+          <a:lstStyle/>
+          <a:p>
+            <a:pPr indent="0" marL="0">
+              <a:buNone/>
+            </a:pPr>
+            <a:r>
+              <a:rPr lang="en-US" sz="1450" dirty="0">
                 <a:solidFill>
                   <a:srgbClr val="5C6B84"/>
                 </a:solidFill>
@@ -2264,16 +2242,16 @@
                 <a:ea typeface="Yu Gothic" pitchFamily="34" charset="-122"/>
                 <a:cs typeface="Yu Gothic" pitchFamily="34" charset="-120"/>
               </a:rPr>
-              <a:t>倍率・内申・部活・通学・制服・</a:t>
-            </a:r>
-            <a:endParaRPr lang="en-US" sz="1250" dirty="0"/>
-          </a:p>
-          <a:p>
-            <a:pPr algn="ctr" indent="0" marL="0">
-              <a:buNone/>
-            </a:pPr>
-            <a:r>
-              <a:rPr lang="en-US" sz="1250" dirty="0">
+              <a:t>その最初の一歩が、ない。</a:t>
+            </a:r>
+            <a:endParaRPr lang="en-US" sz="1450" dirty="0"/>
+          </a:p>
+          <a:p>
+            <a:pPr indent="0" marL="0">
+              <a:buNone/>
+            </a:pPr>
+            <a:r>
+              <a:rPr lang="en-US" sz="1450" dirty="0">
                 <a:solidFill>
                   <a:srgbClr val="5C6B84"/>
                 </a:solidFill>
@@ -2281,82 +2259,9 @@
                 <a:ea typeface="Yu Gothic" pitchFamily="34" charset="-122"/>
                 <a:cs typeface="Yu Gothic" pitchFamily="34" charset="-120"/>
               </a:rPr>
-              <a:t>課程・実績 — 見る観点</a:t>
-            </a:r>
-            <a:endParaRPr lang="en-US" sz="1250" dirty="0"/>
-          </a:p>
-        </p:txBody>
-      </p:sp>
-      <p:sp>
-        <p:nvSpPr>
-          <p:cNvPr id="9" name="Shape 7"/>
-          <p:cNvSpPr/>
-          <p:nvPr/>
-        </p:nvSpPr>
-        <p:spPr>
-          <a:xfrm>
-            <a:off x="8138160" y="1600200"/>
-            <a:ext cx="3383280" cy="2286000"/>
-          </a:xfrm>
-          <a:prstGeom prst="roundRect">
-            <a:avLst>
-              <a:gd name="adj" fmla="val 4800"/>
-            </a:avLst>
-          </a:prstGeom>
-          <a:solidFill>
-            <a:srgbClr val="FFFFFF"/>
-          </a:solidFill>
-          <a:ln w="12700">
-            <a:solidFill>
-              <a:srgbClr val="D7DDE8"/>
-            </a:solidFill>
-            <a:prstDash val="solid"/>
-          </a:ln>
-          <a:effectLst>
-            <a:outerShdw sx="100000" sy="100000" kx="0" ky="0" algn="bl" rotWithShape="0" blurRad="101600" dist="38100" dir="5400000">
-              <a:srgbClr val="1A2333">
-                <a:alpha val="12000"/>
-              </a:srgbClr>
-            </a:outerShdw>
-          </a:effectLst>
-        </p:spPr>
-      </p:sp>
-      <p:sp>
-        <p:nvSpPr>
-          <p:cNvPr id="10" name="Text 8"/>
-          <p:cNvSpPr/>
-          <p:nvPr/>
-        </p:nvSpPr>
-        <p:spPr>
-          <a:xfrm>
-            <a:off x="8138160" y="1874520"/>
-            <a:ext cx="3383280" cy="914400"/>
-          </a:xfrm>
-          <a:prstGeom prst="rect">
-            <a:avLst/>
-          </a:prstGeom>
-          <a:noFill/>
-          <a:ln/>
-        </p:spPr>
-        <p:txBody>
-          <a:bodyPr wrap="square" lIns="0" tIns="0" rIns="0" bIns="0" rtlCol="0" anchor="ctr"/>
-          <a:lstStyle/>
-          <a:p>
-            <a:pPr algn="ctr" indent="0" marL="0">
-              <a:buNone/>
-            </a:pPr>
-            <a:r>
-              <a:rPr lang="en-US" sz="4400" b="1" dirty="0">
-                <a:solidFill>
-                  <a:srgbClr val="33527E"/>
-                </a:solidFill>
-                <a:latin typeface="Yu Gothic" pitchFamily="34" charset="0"/>
-                <a:ea typeface="Yu Gothic" pitchFamily="34" charset="-122"/>
-                <a:cs typeface="Yu Gothic" pitchFamily="34" charset="-120"/>
-              </a:rPr>
-              <a:t>バラバラ</a:t>
-            </a:r>
-            <a:endParaRPr lang="en-US" sz="4400" dirty="0"/>
+              <a:t>189校をどう絞るかから、自分で考える。</a:t>
+            </a:r>
+            <a:endParaRPr lang="en-US" sz="1450" dirty="0"/>
           </a:p>
         </p:txBody>
       </p:sp>
@@ -2368,51 +2273,34 @@
         </p:nvSpPr>
         <p:spPr>
           <a:xfrm>
-            <a:off x="8366760" y="2834640"/>
-            <a:ext cx="2926080" cy="914400"/>
-          </a:xfrm>
-          <a:prstGeom prst="rect">
-            <a:avLst/>
-          </a:prstGeom>
-          <a:noFill/>
-          <a:ln/>
-        </p:spPr>
-        <p:txBody>
-          <a:bodyPr wrap="square" lIns="0" tIns="0" rIns="0" bIns="0" rtlCol="0" anchor="ctr"/>
-          <a:lstStyle/>
-          <a:p>
-            <a:pPr algn="ctr" indent="0" marL="0">
-              <a:buNone/>
-            </a:pPr>
-            <a:r>
-              <a:rPr lang="en-US" sz="1250" dirty="0">
-                <a:solidFill>
-                  <a:srgbClr val="5C6B84"/>
-                </a:solidFill>
-                <a:latin typeface="Yu Gothic" pitchFamily="34" charset="0"/>
-                <a:ea typeface="Yu Gothic" pitchFamily="34" charset="-122"/>
-                <a:cs typeface="Yu Gothic" pitchFamily="34" charset="-120"/>
-              </a:rPr>
-              <a:t>情報は学校サイト・都教委・</a:t>
-            </a:r>
-            <a:endParaRPr lang="en-US" sz="1250" dirty="0"/>
-          </a:p>
-          <a:p>
-            <a:pPr algn="ctr" indent="0" marL="0">
-              <a:buNone/>
-            </a:pPr>
-            <a:r>
-              <a:rPr lang="en-US" sz="1250" dirty="0">
-                <a:solidFill>
-                  <a:srgbClr val="5C6B84"/>
-                </a:solidFill>
-                <a:latin typeface="Yu Gothic" pitchFamily="34" charset="0"/>
-                <a:ea typeface="Yu Gothic" pitchFamily="34" charset="-122"/>
-                <a:cs typeface="Yu Gothic" pitchFamily="34" charset="-120"/>
-              </a:rPr>
-              <a:t>連盟の記録に散在</a:t>
-            </a:r>
-            <a:endParaRPr lang="en-US" sz="1250" dirty="0"/>
+            <a:off x="640080" y="4709160"/>
+            <a:ext cx="10972800" cy="548640"/>
+          </a:xfrm>
+          <a:prstGeom prst="rect">
+            <a:avLst/>
+          </a:prstGeom>
+          <a:noFill/>
+          <a:ln/>
+        </p:spPr>
+        <p:txBody>
+          <a:bodyPr wrap="square" lIns="0" tIns="0" rIns="0" bIns="0" rtlCol="0" anchor="ctr"/>
+          <a:lstStyle/>
+          <a:p>
+            <a:pPr indent="0" marL="0">
+              <a:buNone/>
+            </a:pPr>
+            <a:r>
+              <a:rPr lang="en-US" sz="2600" b="1" dirty="0">
+                <a:solidFill>
+                  <a:srgbClr val="1A2333"/>
+                </a:solidFill>
+                <a:latin typeface="Yu Gothic" pitchFamily="34" charset="0"/>
+                <a:ea typeface="Yu Gothic" pitchFamily="34" charset="-122"/>
+                <a:cs typeface="Yu Gothic" pitchFamily="34" charset="-120"/>
+              </a:rPr>
+              <a:t>「うちの子は、どこから見ればいいのか」</a:t>
+            </a:r>
+            <a:endParaRPr lang="en-US" sz="2600" dirty="0"/>
           </a:p>
         </p:txBody>
       </p:sp>
@@ -2424,61 +2312,7 @@
         </p:nvSpPr>
         <p:spPr>
           <a:xfrm>
-            <a:off x="640080" y="4343400"/>
-            <a:ext cx="10972800" cy="914400"/>
-          </a:xfrm>
-          <a:prstGeom prst="rect">
-            <a:avLst/>
-          </a:prstGeom>
-          <a:noFill/>
-          <a:ln/>
-        </p:spPr>
-        <p:txBody>
-          <a:bodyPr wrap="square" lIns="0" tIns="0" rIns="0" bIns="0" rtlCol="0" anchor="ctr"/>
-          <a:lstStyle/>
-          <a:p>
-            <a:pPr indent="0" marL="0">
-              <a:buNone/>
-            </a:pPr>
-            <a:r>
-              <a:rPr lang="en-US" sz="1900" dirty="0">
-                <a:solidFill>
-                  <a:srgbClr val="5C6B84"/>
-                </a:solidFill>
-                <a:latin typeface="Yu Gothic" pitchFamily="34" charset="0"/>
-                <a:ea typeface="Yu Gothic" pitchFamily="34" charset="-122"/>
-                <a:cs typeface="Yu Gothic" pitchFamily="34" charset="-120"/>
-              </a:rPr>
-              <a:t>塾に通う家庭には、面談で一緒に考えてくれる先生がいる。
-</a:t>
-            </a:r>
-            <a:pPr indent="0" marL="0">
-              <a:buNone/>
-            </a:pPr>
-            <a:r>
-              <a:rPr lang="en-US" sz="1900" b="1" dirty="0">
-                <a:solidFill>
-                  <a:srgbClr val="1A2333"/>
-                </a:solidFill>
-                <a:latin typeface="Yu Gothic" pitchFamily="34" charset="0"/>
-                <a:ea typeface="Yu Gothic" pitchFamily="34" charset="-122"/>
-                <a:cs typeface="Yu Gothic" pitchFamily="34" charset="-120"/>
-              </a:rPr>
-              <a:t>通わない家庭には、その相談相手がいない。</a:t>
-            </a:r>
-            <a:endParaRPr lang="en-US" sz="1900" dirty="0"/>
-          </a:p>
-        </p:txBody>
-      </p:sp>
-      <p:sp>
-        <p:nvSpPr>
-          <p:cNvPr id="13" name="Text 11"/>
-          <p:cNvSpPr/>
-          <p:nvPr/>
-        </p:nvSpPr>
-        <p:spPr>
-          <a:xfrm>
-            <a:off x="640080" y="5394960"/>
+            <a:off x="640080" y="5440680"/>
             <a:ext cx="10972800" cy="548640"/>
           </a:xfrm>
           <a:prstGeom prst="rect">
@@ -2495,7 +2329,7 @@
               <a:buNone/>
             </a:pPr>
             <a:r>
-              <a:rPr lang="en-US" sz="2100" b="1" dirty="0">
+              <a:rPr lang="en-US" sz="1700" b="1" dirty="0">
                 <a:solidFill>
                   <a:srgbClr val="A87F2F"/>
                 </a:solidFill>
@@ -2503,9 +2337,9 @@
                 <a:ea typeface="Yu Gothic" pitchFamily="34" charset="-122"/>
                 <a:cs typeface="Yu Gothic" pitchFamily="34" charset="-120"/>
               </a:rPr>
-              <a:t>進路コンパスは、その「塾の面談」を会話AIで再現します。</a:t>
-            </a:r>
-            <a:endParaRPr lang="en-US" sz="2100" dirty="0"/>
+              <a:t>進路コンパスは、その一歩目をつくります。答えを出す道具ではなく、考え始めるための出発点です。</a:t>
+            </a:r>
+            <a:endParaRPr lang="en-US" sz="1700" dirty="0"/>
           </a:p>
         </p:txBody>
       </p:sp>
@@ -2549,8 +2383,8 @@
         </p:nvSpPr>
         <p:spPr>
           <a:xfrm>
-            <a:off x="640080" y="502920"/>
-            <a:ext cx="10972800" cy="731520"/>
+            <a:off x="640080" y="457200"/>
+            <a:ext cx="10972800" cy="777240"/>
           </a:xfrm>
           <a:prstGeom prst="rect">
             <a:avLst/>
@@ -2574,7 +2408,7 @@
                 <a:ea typeface="Yu Gothic" pitchFamily="34" charset="-122"/>
                 <a:cs typeface="Yu Gothic" pitchFamily="34" charset="-120"/>
               </a:rPr>
-              <a:t>使い方 — 3つの質問に答えるだけ</a:t>
+              <a:t>3つの質問に答えるだけで、はじめの数校が出る</a:t>
             </a:r>
             <a:endParaRPr lang="en-US" sz="3200" dirty="0"/>
           </a:p>
@@ -2582,7 +2416,7 @@
       </p:sp>
       <p:pic>
         <p:nvPicPr>
-          <p:cNvPr id="3" name="Image 0" descr="/tmp/claude-0/-home-user-knowledge-base/ce7faca9-342a-5cd4-886e-c73f2ae459cd/scratchpad/deck/s_chat.png">    </p:cNvPr>
+          <p:cNvPr id="3" name="Image 0" descr="/tmp/claude-0/-home-user-knowledge-base/ce7faca9-342a-5cd4-886e-c73f2ae459cd/scratchpad/deck/n_chat.png">    </p:cNvPr>
           <p:cNvPicPr>
             <a:picLocks noChangeAspect="1"/>
           </p:cNvPicPr>
@@ -2596,8 +2430,8 @@
         </p:blipFill>
         <p:spPr>
           <a:xfrm>
-            <a:off x="822960" y="1463040"/>
-            <a:ext cx="2497926" cy="4937760"/>
+            <a:off x="822960" y="1417320"/>
+            <a:ext cx="2457450" cy="5029200"/>
           </a:xfrm>
           <a:prstGeom prst="rect">
             <a:avLst/>
@@ -2619,7 +2453,7 @@
         </p:nvSpPr>
         <p:spPr>
           <a:xfrm>
-            <a:off x="4206240" y="1645920"/>
+            <a:off x="4297680" y="1600200"/>
             <a:ext cx="566928" cy="566928"/>
           </a:xfrm>
           <a:prstGeom prst="ellipse">
@@ -2639,7 +2473,7 @@
         </p:nvSpPr>
         <p:spPr>
           <a:xfrm>
-            <a:off x="4206240" y="1645920"/>
+            <a:off x="4297680" y="1600200"/>
             <a:ext cx="566928" cy="566928"/>
           </a:xfrm>
           <a:prstGeom prst="rect">
@@ -2678,24 +2512,24 @@
         </p:nvSpPr>
         <p:spPr>
           <a:xfrm>
-            <a:off x="4983480" y="1609344"/>
-            <a:ext cx="6583680" cy="457200"/>
-          </a:xfrm>
-          <a:prstGeom prst="rect">
-            <a:avLst/>
-          </a:prstGeom>
-          <a:noFill/>
-          <a:ln/>
-        </p:spPr>
-        <p:txBody>
-          <a:bodyPr wrap="square" lIns="0" tIns="0" rIns="0" bIns="0" rtlCol="0" anchor="ctr"/>
-          <a:lstStyle/>
-          <a:p>
-            <a:pPr indent="0" marL="0">
-              <a:buNone/>
-            </a:pPr>
-            <a:r>
-              <a:rPr lang="en-US" sz="2000" b="1" dirty="0">
+            <a:off x="5074920" y="1563624"/>
+            <a:ext cx="6492240" cy="457200"/>
+          </a:xfrm>
+          <a:prstGeom prst="rect">
+            <a:avLst/>
+          </a:prstGeom>
+          <a:noFill/>
+          <a:ln/>
+        </p:spPr>
+        <p:txBody>
+          <a:bodyPr wrap="square" lIns="0" tIns="0" rIns="0" bIns="0" rtlCol="0" anchor="ctr"/>
+          <a:lstStyle/>
+          <a:p>
+            <a:pPr indent="0" marL="0">
+              <a:buNone/>
+            </a:pPr>
+            <a:r>
+              <a:rPr lang="en-US" sz="1900" b="1" dirty="0">
                 <a:solidFill>
                   <a:srgbClr val="1A2333"/>
                 </a:solidFill>
@@ -2703,9 +2537,9 @@
                 <a:ea typeface="Yu Gothic" pitchFamily="34" charset="-122"/>
                 <a:cs typeface="Yu Gothic" pitchFamily="34" charset="-120"/>
               </a:rPr>
-              <a:t>最寄り駅と通学時間</a:t>
-            </a:r>
-            <a:endParaRPr lang="en-US" sz="2000" dirty="0"/>
+              <a:t>最寄り駅と、通えそうな時間</a:t>
+            </a:r>
+            <a:endParaRPr lang="en-US" sz="1900" dirty="0"/>
           </a:p>
         </p:txBody>
       </p:sp>
@@ -2717,8 +2551,8 @@
         </p:nvSpPr>
         <p:spPr>
           <a:xfrm>
-            <a:off x="4983480" y="2084832"/>
-            <a:ext cx="6583680" cy="777240"/>
+            <a:off x="5074920" y="2020824"/>
+            <a:ext cx="6492240" cy="822960"/>
           </a:xfrm>
           <a:prstGeom prst="rect">
             <a:avLst/>
@@ -2756,7 +2590,7 @@
         </p:nvSpPr>
         <p:spPr>
           <a:xfrm>
-            <a:off x="4206240" y="3063240"/>
+            <a:off x="4297680" y="3017520"/>
             <a:ext cx="566928" cy="566928"/>
           </a:xfrm>
           <a:prstGeom prst="ellipse">
@@ -2776,7 +2610,7 @@
         </p:nvSpPr>
         <p:spPr>
           <a:xfrm>
-            <a:off x="4206240" y="3063240"/>
+            <a:off x="4297680" y="3017520"/>
             <a:ext cx="566928" cy="566928"/>
           </a:xfrm>
           <a:prstGeom prst="rect">
@@ -2815,24 +2649,24 @@
         </p:nvSpPr>
         <p:spPr>
           <a:xfrm>
-            <a:off x="4983480" y="3026664"/>
-            <a:ext cx="6583680" cy="457200"/>
-          </a:xfrm>
-          <a:prstGeom prst="rect">
-            <a:avLst/>
-          </a:prstGeom>
-          <a:noFill/>
-          <a:ln/>
-        </p:spPr>
-        <p:txBody>
-          <a:bodyPr wrap="square" lIns="0" tIns="0" rIns="0" bIns="0" rtlCol="0" anchor="ctr"/>
-          <a:lstStyle/>
-          <a:p>
-            <a:pPr indent="0" marL="0">
-              <a:buNone/>
-            </a:pPr>
-            <a:r>
-              <a:rPr lang="en-US" sz="2000" b="1" dirty="0">
+            <a:off x="5074920" y="2980944"/>
+            <a:ext cx="6492240" cy="457200"/>
+          </a:xfrm>
+          <a:prstGeom prst="rect">
+            <a:avLst/>
+          </a:prstGeom>
+          <a:noFill/>
+          <a:ln/>
+        </p:spPr>
+        <p:txBody>
+          <a:bodyPr wrap="square" lIns="0" tIns="0" rIns="0" bIns="0" rtlCol="0" anchor="ctr"/>
+          <a:lstStyle/>
+          <a:p>
+            <a:pPr indent="0" marL="0">
+              <a:buNone/>
+            </a:pPr>
+            <a:r>
+              <a:rPr lang="en-US" sz="1900" b="1" dirty="0">
                 <a:solidFill>
                   <a:srgbClr val="1A2333"/>
                 </a:solidFill>
@@ -2842,7 +2676,7 @@
               </a:rPr>
               <a:t>成績の目安</a:t>
             </a:r>
-            <a:endParaRPr lang="en-US" sz="2000" dirty="0"/>
+            <a:endParaRPr lang="en-US" sz="1900" dirty="0"/>
           </a:p>
         </p:txBody>
       </p:sp>
@@ -2854,8 +2688,8 @@
         </p:nvSpPr>
         <p:spPr>
           <a:xfrm>
-            <a:off x="4983480" y="3502152"/>
-            <a:ext cx="6583680" cy="777240"/>
+            <a:off x="5074920" y="3438144"/>
+            <a:ext cx="6492240" cy="822960"/>
           </a:xfrm>
           <a:prstGeom prst="rect">
             <a:avLst/>
@@ -2879,7 +2713,7 @@
                 <a:ea typeface="Yu Gothic" pitchFamily="34" charset="-122"/>
                 <a:cs typeface="Yu Gothic" pitchFamily="34" charset="-120"/>
               </a:rPr>
-              <a:t>内申は5教科と実技を分けて聞き、1020点満点の見込みを一緒に計算。「まだ分からない」でも進めます</a:t>
+              <a:t>内申は5教科と実技を分けて聞き、1020点満点の見込みを一緒に計算。「まだ分からない」でも先へ進めます</a:t>
             </a:r>
             <a:endParaRPr lang="en-US" sz="1350" dirty="0"/>
           </a:p>
@@ -2893,7 +2727,7 @@
         </p:nvSpPr>
         <p:spPr>
           <a:xfrm>
-            <a:off x="4206240" y="4480560"/>
+            <a:off x="4297680" y="4434840"/>
             <a:ext cx="566928" cy="566928"/>
           </a:xfrm>
           <a:prstGeom prst="ellipse">
@@ -2913,7 +2747,7 @@
         </p:nvSpPr>
         <p:spPr>
           <a:xfrm>
-            <a:off x="4206240" y="4480560"/>
+            <a:off x="4297680" y="4434840"/>
             <a:ext cx="566928" cy="566928"/>
           </a:xfrm>
           <a:prstGeom prst="rect">
@@ -2952,24 +2786,24 @@
         </p:nvSpPr>
         <p:spPr>
           <a:xfrm>
-            <a:off x="4983480" y="4443984"/>
-            <a:ext cx="6583680" cy="457200"/>
-          </a:xfrm>
-          <a:prstGeom prst="rect">
-            <a:avLst/>
-          </a:prstGeom>
-          <a:noFill/>
-          <a:ln/>
-        </p:spPr>
-        <p:txBody>
-          <a:bodyPr wrap="square" lIns="0" tIns="0" rIns="0" bIns="0" rtlCol="0" anchor="ctr"/>
-          <a:lstStyle/>
-          <a:p>
-            <a:pPr indent="0" marL="0">
-              <a:buNone/>
-            </a:pPr>
-            <a:r>
-              <a:rPr lang="en-US" sz="2000" b="1" dirty="0">
+            <a:off x="5074920" y="4398264"/>
+            <a:ext cx="6492240" cy="457200"/>
+          </a:xfrm>
+          <a:prstGeom prst="rect">
+            <a:avLst/>
+          </a:prstGeom>
+          <a:noFill/>
+          <a:ln/>
+        </p:spPr>
+        <p:txBody>
+          <a:bodyPr wrap="square" lIns="0" tIns="0" rIns="0" bIns="0" rtlCol="0" anchor="ctr"/>
+          <a:lstStyle/>
+          <a:p>
+            <a:pPr indent="0" marL="0">
+              <a:buNone/>
+            </a:pPr>
+            <a:r>
+              <a:rPr lang="en-US" sz="1900" b="1" dirty="0">
                 <a:solidFill>
                   <a:srgbClr val="1A2333"/>
                 </a:solidFill>
@@ -2977,9 +2811,9 @@
                 <a:ea typeface="Yu Gothic" pitchFamily="34" charset="-122"/>
                 <a:cs typeface="Yu Gothic" pitchFamily="34" charset="-120"/>
               </a:rPr>
-              <a:t>希望と、いちばん大事なこと</a:t>
-            </a:r>
-            <a:endParaRPr lang="en-US" sz="2000" dirty="0"/>
+              <a:t>希望と、いちばん大事にしたいこと</a:t>
+            </a:r>
+            <a:endParaRPr lang="en-US" sz="1900" dirty="0"/>
           </a:p>
         </p:txBody>
       </p:sp>
@@ -2991,8 +2825,8 @@
         </p:nvSpPr>
         <p:spPr>
           <a:xfrm>
-            <a:off x="4983480" y="4919472"/>
-            <a:ext cx="6583680" cy="777240"/>
+            <a:off x="5074920" y="4855464"/>
+            <a:ext cx="6492240" cy="822960"/>
           </a:xfrm>
           <a:prstGeom prst="rect">
             <a:avLst/>
@@ -3016,7 +2850,7 @@
                 <a:ea typeface="Yu Gothic" pitchFamily="34" charset="-122"/>
                 <a:cs typeface="Yu Gothic" pitchFamily="34" charset="-120"/>
               </a:rPr>
-              <a:t>「吹奏楽をやりたい」「制服がない学校がいい」を自由な言葉で。最後に重視軸（近さ／進学／届きそう）を1つ</a:t>
+              <a:t>「吹奏楽をやりたい」「制服がない学校がいい」を自由な言葉で。最後に並べ方の軸を1つ選びます</a:t>
             </a:r>
             <a:endParaRPr lang="en-US" sz="1350" dirty="0"/>
           </a:p>
@@ -3030,34 +2864,34 @@
         </p:nvSpPr>
         <p:spPr>
           <a:xfrm>
-            <a:off x="4983480" y="5989320"/>
-            <a:ext cx="6583680" cy="411480"/>
-          </a:xfrm>
-          <a:prstGeom prst="rect">
-            <a:avLst/>
-          </a:prstGeom>
-          <a:noFill/>
-          <a:ln/>
-        </p:spPr>
-        <p:txBody>
-          <a:bodyPr wrap="square" lIns="0" tIns="0" rIns="0" bIns="0" rtlCol="0" anchor="ctr"/>
-          <a:lstStyle/>
-          <a:p>
-            <a:pPr indent="0" marL="0">
-              <a:buNone/>
-            </a:pPr>
-            <a:r>
-              <a:rPr lang="en-US" sz="1250" i="1" dirty="0">
-                <a:solidFill>
-                  <a:srgbClr val="8B97AC"/>
-                </a:solidFill>
-                <a:latin typeface="Yu Gothic" pitchFamily="34" charset="0"/>
-                <a:ea typeface="Yu Gothic" pitchFamily="34" charset="-122"/>
-                <a:cs typeface="Yu Gothic" pitchFamily="34" charset="-120"/>
-              </a:rPr>
-              <a:t>所要3分 ・ 会話は規則ベース＋LLM（Workers AI）の二段構え</a:t>
-            </a:r>
-            <a:endParaRPr lang="en-US" sz="1250" dirty="0"/>
+            <a:off x="5074920" y="5943600"/>
+            <a:ext cx="6492240" cy="411480"/>
+          </a:xfrm>
+          <a:prstGeom prst="rect">
+            <a:avLst/>
+          </a:prstGeom>
+          <a:noFill/>
+          <a:ln/>
+        </p:spPr>
+        <p:txBody>
+          <a:bodyPr wrap="square" lIns="0" tIns="0" rIns="0" bIns="0" rtlCol="0" anchor="ctr"/>
+          <a:lstStyle/>
+          <a:p>
+            <a:pPr indent="0" marL="0">
+              <a:buNone/>
+            </a:pPr>
+            <a:r>
+              <a:rPr lang="en-US" sz="1350" i="1" dirty="0">
+                <a:solidFill>
+                  <a:srgbClr val="A87F2F"/>
+                </a:solidFill>
+                <a:latin typeface="Yu Gothic" pitchFamily="34" charset="0"/>
+                <a:ea typeface="Yu Gothic" pitchFamily="34" charset="-122"/>
+                <a:cs typeface="Yu Gothic" pitchFamily="34" charset="-120"/>
+              </a:rPr>
+              <a:t>分からない項目は飛ばせます。入り口で立ち止まらせないための設計です。</a:t>
+            </a:r>
+            <a:endParaRPr lang="en-US" sz="1350" dirty="0"/>
           </a:p>
         </p:txBody>
       </p:sp>
@@ -3101,8 +2935,8 @@
         </p:nvSpPr>
         <p:spPr>
           <a:xfrm>
-            <a:off x="640080" y="502920"/>
-            <a:ext cx="10972800" cy="731520"/>
+            <a:off x="640080" y="457200"/>
+            <a:ext cx="10972800" cy="777240"/>
           </a:xfrm>
           <a:prstGeom prst="rect">
             <a:avLst/>
@@ -3126,7 +2960,7 @@
                 <a:ea typeface="Yu Gothic" pitchFamily="34" charset="-122"/>
                 <a:cs typeface="Yu Gothic" pitchFamily="34" charset="-120"/>
               </a:rPr>
-              <a:t>3つの圏に分けて提案 — 並べ方は家庭の価値観で</a:t>
+              <a:t>出すのは順位ではなく、方角</a:t>
             </a:r>
             <a:endParaRPr lang="en-US" sz="3200" dirty="0"/>
           </a:p>
@@ -3134,7 +2968,7 @@
       </p:sp>
       <p:pic>
         <p:nvPicPr>
-          <p:cNvPr id="3" name="Image 0" descr="/tmp/claude-0/-home-user-knowledge-base/ce7faca9-342a-5cd4-886e-c73f2ae459cd/scratchpad/deck/s_cards.png">    </p:cNvPr>
+          <p:cNvPr id="3" name="Image 0" descr="/tmp/claude-0/-home-user-knowledge-base/ce7faca9-342a-5cd4-886e-c73f2ae459cd/scratchpad/deck/n_cards.png">    </p:cNvPr>
           <p:cNvPicPr>
             <a:picLocks noChangeAspect="1"/>
           </p:cNvPicPr>
@@ -3148,8 +2982,8 @@
         </p:blipFill>
         <p:spPr>
           <a:xfrm>
-            <a:off x="8366760" y="1463040"/>
-            <a:ext cx="2497926" cy="4937760"/>
+            <a:off x="8412480" y="1417320"/>
+            <a:ext cx="2457450" cy="5029200"/>
           </a:xfrm>
           <a:prstGeom prst="rect">
             <a:avLst/>
@@ -3171,12 +3005,12 @@
         </p:nvSpPr>
         <p:spPr>
           <a:xfrm>
-            <a:off x="640080" y="1600200"/>
-            <a:ext cx="1371600" cy="475488"/>
+            <a:off x="640080" y="1554480"/>
+            <a:ext cx="1371600" cy="457200"/>
           </a:xfrm>
           <a:prstGeom prst="roundRect">
             <a:avLst>
-              <a:gd name="adj" fmla="val 15385"/>
+              <a:gd name="adj" fmla="val 16000"/>
             </a:avLst>
           </a:prstGeom>
           <a:solidFill>
@@ -3193,8 +3027,8 @@
         </p:nvSpPr>
         <p:spPr>
           <a:xfrm>
-            <a:off x="640080" y="1600200"/>
-            <a:ext cx="1371600" cy="475488"/>
+            <a:off x="640080" y="1554480"/>
+            <a:ext cx="1371600" cy="457200"/>
           </a:xfrm>
           <a:prstGeom prst="rect">
             <a:avLst/>
@@ -3232,8 +3066,8 @@
         </p:nvSpPr>
         <p:spPr>
           <a:xfrm>
-            <a:off x="2194560" y="1600200"/>
-            <a:ext cx="5120640" cy="475488"/>
+            <a:off x="2194560" y="1554480"/>
+            <a:ext cx="5120640" cy="457200"/>
           </a:xfrm>
           <a:prstGeom prst="rect">
             <a:avLst/>
@@ -3271,12 +3105,12 @@
         </p:nvSpPr>
         <p:spPr>
           <a:xfrm>
-            <a:off x="640080" y="2313432"/>
-            <a:ext cx="1371600" cy="475488"/>
+            <a:off x="640080" y="2212848"/>
+            <a:ext cx="1371600" cy="457200"/>
           </a:xfrm>
           <a:prstGeom prst="roundRect">
             <a:avLst>
-              <a:gd name="adj" fmla="val 15385"/>
+              <a:gd name="adj" fmla="val 16000"/>
             </a:avLst>
           </a:prstGeom>
           <a:solidFill>
@@ -3293,8 +3127,8 @@
         </p:nvSpPr>
         <p:spPr>
           <a:xfrm>
-            <a:off x="640080" y="2313432"/>
-            <a:ext cx="1371600" cy="475488"/>
+            <a:off x="640080" y="2212848"/>
+            <a:ext cx="1371600" cy="457200"/>
           </a:xfrm>
           <a:prstGeom prst="rect">
             <a:avLst/>
@@ -3332,8 +3166,8 @@
         </p:nvSpPr>
         <p:spPr>
           <a:xfrm>
-            <a:off x="2194560" y="2313432"/>
-            <a:ext cx="5120640" cy="475488"/>
+            <a:off x="2194560" y="2212848"/>
+            <a:ext cx="5120640" cy="457200"/>
           </a:xfrm>
           <a:prstGeom prst="rect">
             <a:avLst/>
@@ -3371,12 +3205,12 @@
         </p:nvSpPr>
         <p:spPr>
           <a:xfrm>
-            <a:off x="640080" y="3026664"/>
-            <a:ext cx="1371600" cy="475488"/>
+            <a:off x="640080" y="2871216"/>
+            <a:ext cx="1371600" cy="457200"/>
           </a:xfrm>
           <a:prstGeom prst="roundRect">
             <a:avLst>
-              <a:gd name="adj" fmla="val 15385"/>
+              <a:gd name="adj" fmla="val 16000"/>
             </a:avLst>
           </a:prstGeom>
           <a:solidFill>
@@ -3393,8 +3227,8 @@
         </p:nvSpPr>
         <p:spPr>
           <a:xfrm>
-            <a:off x="640080" y="3026664"/>
-            <a:ext cx="1371600" cy="475488"/>
+            <a:off x="640080" y="2871216"/>
+            <a:ext cx="1371600" cy="457200"/>
           </a:xfrm>
           <a:prstGeom prst="rect">
             <a:avLst/>
@@ -3432,8 +3266,8 @@
         </p:nvSpPr>
         <p:spPr>
           <a:xfrm>
-            <a:off x="2194560" y="3026664"/>
-            <a:ext cx="5120640" cy="475488"/>
+            <a:off x="2194560" y="2871216"/>
+            <a:ext cx="5120640" cy="457200"/>
           </a:xfrm>
           <a:prstGeom prst="rect">
             <a:avLst/>
@@ -3471,8 +3305,8 @@
         </p:nvSpPr>
         <p:spPr>
           <a:xfrm>
-            <a:off x="640080" y="3977640"/>
-            <a:ext cx="7406640" cy="1188720"/>
+            <a:off x="640080" y="3749040"/>
+            <a:ext cx="7498080" cy="1097280"/>
           </a:xfrm>
           <a:prstGeom prst="rect">
             <a:avLst/>
@@ -3496,14 +3330,14 @@
                 <a:ea typeface="Yu Gothic" pitchFamily="34" charset="-122"/>
                 <a:cs typeface="Yu Gothic" pitchFamily="34" charset="-120"/>
               </a:rPr>
-              <a:t>重視軸で並びが変わる
+              <a:t>家庭ごとに、北が変わる
 </a:t>
             </a:r>
             <a:pPr indent="0" marL="0">
               <a:buNone/>
             </a:pPr>
             <a:r>
-              <a:rPr lang="en-US" sz="1300" dirty="0">
+              <a:rPr lang="en-US" sz="1350" dirty="0">
                 <a:solidFill>
                   <a:srgbClr val="5C6B84"/>
                 </a:solidFill>
@@ -3511,7 +3345,7 @@
                 <a:ea typeface="Yu Gothic" pitchFamily="34" charset="-122"/>
                 <a:cs typeface="Yu Gothic" pitchFamily="34" charset="-120"/>
               </a:rPr>
-              <a:t>「通学の近さ」なら近い順、「大学進学」なら進学指導指定校を先に、</a:t>
+              <a:t>「通学の近さ」「大学進学」「いま届きそうなところ」——大事にしたいことを1つ選ぶと、</a:t>
             </a:r>
             <a:endParaRPr lang="en-US" sz="1600" dirty="0"/>
           </a:p>
@@ -3520,7 +3354,7 @@
               <a:buNone/>
             </a:pPr>
             <a:r>
-              <a:rPr lang="en-US" sz="1300" dirty="0">
+              <a:rPr lang="en-US" sz="1350" dirty="0">
                 <a:solidFill>
                   <a:srgbClr val="5C6B84"/>
                 </a:solidFill>
@@ -3528,7 +3362,7 @@
                 <a:ea typeface="Yu Gothic" pitchFamily="34" charset="-122"/>
                 <a:cs typeface="Yu Gothic" pitchFamily="34" charset="-120"/>
               </a:rPr>
-              <a:t>「いま届きそう」なら安全圏から。何を最優先にしたかは必ず一文目で伝えます。</a:t>
+              <a:t>並び順が変わります。何を最優先にしたかは、必ず最初の一文で伝えます。</a:t>
             </a:r>
             <a:endParaRPr lang="en-US" sz="1600" dirty="0"/>
           </a:p>
@@ -3542,8 +3376,8 @@
         </p:nvSpPr>
         <p:spPr>
           <a:xfrm>
-            <a:off x="640080" y="5257800"/>
-            <a:ext cx="7406640" cy="1097280"/>
+            <a:off x="640080" y="4937760"/>
+            <a:ext cx="7498080" cy="1097280"/>
           </a:xfrm>
           <a:prstGeom prst="rect">
             <a:avLst/>
@@ -3567,14 +3401,14 @@
                 <a:ea typeface="Yu Gothic" pitchFamily="34" charset="-122"/>
                 <a:cs typeface="Yu Gothic" pitchFamily="34" charset="-120"/>
               </a:rPr>
-              <a:t>点数で測れない学校も、正しく出す
+              <a:t>点数で測れない学校も、落とさない
 </a:t>
             </a:r>
             <a:pPr indent="0" marL="0">
               <a:buNone/>
             </a:pPr>
             <a:r>
-              <a:rPr lang="en-US" sz="1300" dirty="0">
+              <a:rPr lang="en-US" sz="1350" dirty="0">
                 <a:solidFill>
                   <a:srgbClr val="5C6B84"/>
                 </a:solidFill>
@@ -3582,7 +3416,7 @@
                 <a:ea typeface="Yu Gothic" pitchFamily="34" charset="-122"/>
                 <a:cs typeface="Yu Gothic" pitchFamily="34" charset="-120"/>
               </a:rPr>
-              <a:t>ものづくり志望には高専を提案。定時制・エンカレッジ校は「測り方が違う」</a:t>
+              <a:t>高専・定時制・エンカレッジ校は「測り方が違う」と書いて候補に残します。</a:t>
             </a:r>
             <a:endParaRPr lang="en-US" sz="1600" dirty="0"/>
           </a:p>
@@ -3591,7 +3425,7 @@
               <a:buNone/>
             </a:pPr>
             <a:r>
-              <a:rPr lang="en-US" sz="1300" dirty="0">
+              <a:rPr lang="en-US" sz="1350" dirty="0">
                 <a:solidFill>
                   <a:srgbClr val="5C6B84"/>
                 </a:solidFill>
@@ -3599,9 +3433,48 @@
                 <a:ea typeface="Yu Gothic" pitchFamily="34" charset="-122"/>
                 <a:cs typeface="Yu Gothic" pitchFamily="34" charset="-120"/>
               </a:rPr>
-              <a:t>ことを明示し、データ不備に見せません。</a:t>
+              <a:t>ものづくり志望の家庭には、本人が知らなくても高専を挙げる。</a:t>
             </a:r>
             <a:endParaRPr lang="en-US" sz="1600" dirty="0"/>
+          </a:p>
+        </p:txBody>
+      </p:sp>
+      <p:sp>
+        <p:nvSpPr>
+          <p:cNvPr id="15" name="Text 12"/>
+          <p:cNvSpPr/>
+          <p:nvPr/>
+        </p:nvSpPr>
+        <p:spPr>
+          <a:xfrm>
+            <a:off x="640080" y="6080760"/>
+            <a:ext cx="7498080" cy="411480"/>
+          </a:xfrm>
+          <a:prstGeom prst="rect">
+            <a:avLst/>
+          </a:prstGeom>
+          <a:noFill/>
+          <a:ln/>
+        </p:spPr>
+        <p:txBody>
+          <a:bodyPr wrap="square" lIns="0" tIns="0" rIns="0" bIns="0" rtlCol="0" anchor="ctr"/>
+          <a:lstStyle/>
+          <a:p>
+            <a:pPr indent="0" marL="0">
+              <a:buNone/>
+            </a:pPr>
+            <a:r>
+              <a:rPr lang="en-US" sz="1500" b="1" dirty="0">
+                <a:solidFill>
+                  <a:srgbClr val="A87F2F"/>
+                </a:solidFill>
+                <a:latin typeface="Yu Gothic" pitchFamily="34" charset="0"/>
+                <a:ea typeface="Yu Gothic" pitchFamily="34" charset="-122"/>
+                <a:cs typeface="Yu Gothic" pitchFamily="34" charset="-120"/>
+              </a:rPr>
+              <a:t>決めるのは家庭です。ここは入り口なので、順位はつけません。</a:t>
+            </a:r>
+            <a:endParaRPr lang="en-US" sz="1500" dirty="0"/>
           </a:p>
         </p:txBody>
       </p:sp>
@@ -3645,8 +3518,8 @@
         </p:nvSpPr>
         <p:spPr>
           <a:xfrm>
-            <a:off x="640080" y="502920"/>
-            <a:ext cx="10972800" cy="731520"/>
+            <a:off x="640080" y="457200"/>
+            <a:ext cx="10972800" cy="777240"/>
           </a:xfrm>
           <a:prstGeom prst="rect">
             <a:avLst/>
@@ -3670,7 +3543,7 @@
                 <a:ea typeface="Yu Gothic" pitchFamily="34" charset="-122"/>
                 <a:cs typeface="Yu Gothic" pitchFamily="34" charset="-120"/>
               </a:rPr>
-              <a:t>くらべるシート — 学校見学に持っていける1枚</a:t>
+              <a:t>気になった数校を、持ち出せる1枚に</a:t>
             </a:r>
             <a:endParaRPr lang="en-US" sz="3200" dirty="0"/>
           </a:p>
@@ -3678,7 +3551,7 @@
       </p:sp>
       <p:pic>
         <p:nvPicPr>
-          <p:cNvPr id="3" name="Image 0" descr="/tmp/claude-0/-home-user-knowledge-base/ce7faca9-342a-5cd4-886e-c73f2ae459cd/scratchpad/deck/s_sheetmap.png">    </p:cNvPr>
+          <p:cNvPr id="3" name="Image 0" descr="/tmp/claude-0/-home-user-knowledge-base/ce7faca9-342a-5cd4-886e-c73f2ae459cd/scratchpad/deck/n_sheetmap.png">    </p:cNvPr>
           <p:cNvPicPr>
             <a:picLocks noChangeAspect="1"/>
           </p:cNvPicPr>
@@ -3692,8 +3565,8 @@
         </p:blipFill>
         <p:spPr>
           <a:xfrm>
-            <a:off x="640080" y="1554480"/>
-            <a:ext cx="4664256" cy="3977640"/>
+            <a:off x="640080" y="1508760"/>
+            <a:ext cx="4610644" cy="3931920"/>
           </a:xfrm>
           <a:prstGeom prst="rect">
             <a:avLst/>
@@ -3715,7 +3588,7 @@
         </p:nvSpPr>
         <p:spPr>
           <a:xfrm>
-            <a:off x="5623560" y="1618488"/>
+            <a:off x="5532120" y="1755648"/>
             <a:ext cx="146304" cy="146304"/>
           </a:xfrm>
           <a:prstGeom prst="ellipse">
@@ -3735,8 +3608,8 @@
         </p:nvSpPr>
         <p:spPr>
           <a:xfrm>
-            <a:off x="5943600" y="1490472"/>
-            <a:ext cx="5669280" cy="411480"/>
+            <a:off x="5852160" y="1609344"/>
+            <a:ext cx="5760720" cy="411480"/>
           </a:xfrm>
           <a:prstGeom prst="rect">
             <a:avLst/>
@@ -3760,7 +3633,7 @@
                 <a:ea typeface="Yu Gothic" pitchFamily="34" charset="-122"/>
                 <a:cs typeface="Yu Gothic" pitchFamily="34" charset="-120"/>
               </a:rPr>
-              <a:t>自宅の最寄駅を起点に</a:t>
+              <a:t>自宅の最寄駅を起点にした地図</a:t>
             </a:r>
             <a:endParaRPr lang="en-US" sz="1700" dirty="0"/>
           </a:p>
@@ -3774,24 +3647,24 @@
         </p:nvSpPr>
         <p:spPr>
           <a:xfrm>
-            <a:off x="5943600" y="1901952"/>
-            <a:ext cx="5669280" cy="640080"/>
-          </a:xfrm>
-          <a:prstGeom prst="rect">
-            <a:avLst/>
-          </a:prstGeom>
-          <a:noFill/>
-          <a:ln/>
-        </p:spPr>
-        <p:txBody>
-          <a:bodyPr wrap="square" lIns="0" tIns="0" rIns="0" bIns="0" rtlCol="0" anchor="ctr"/>
-          <a:lstStyle/>
-          <a:p>
-            <a:pPr indent="0" marL="0">
-              <a:buNone/>
-            </a:pPr>
-            <a:r>
-              <a:rPr lang="en-US" sz="1250" dirty="0">
+            <a:off x="5852160" y="2048256"/>
+            <a:ext cx="5760720" cy="731520"/>
+          </a:xfrm>
+          <a:prstGeom prst="rect">
+            <a:avLst/>
+          </a:prstGeom>
+          <a:noFill/>
+          <a:ln/>
+        </p:spPr>
+        <p:txBody>
+          <a:bodyPr wrap="square" lIns="0" tIns="0" rIns="0" bIns="0" rtlCol="0" anchor="ctr"/>
+          <a:lstStyle/>
+          <a:p>
+            <a:pPr indent="0" marL="0">
+              <a:buNone/>
+            </a:pPr>
+            <a:r>
+              <a:rPr lang="en-US" sz="1350" dirty="0">
                 <a:solidFill>
                   <a:srgbClr val="5C6B84"/>
                 </a:solidFill>
@@ -3799,9 +3672,9 @@
                 <a:ea typeface="Yu Gothic" pitchFamily="34" charset="-122"/>
                 <a:cs typeface="Yu Gothic" pitchFamily="34" charset="-120"/>
               </a:rPr>
-              <a:t>気になる学校を同じ縮尺の1枚地図で。家からの方角と距離がひと目で分かります</a:t>
-            </a:r>
-            <a:endParaRPr lang="en-US" sz="1250" dirty="0"/>
+              <a:t>気になる学校を同じ縮尺の1枚に。家からどの方角に、どれだけ離れているかが分かります</a:t>
+            </a:r>
+            <a:endParaRPr lang="en-US" sz="1350" dirty="0"/>
           </a:p>
         </p:txBody>
       </p:sp>
@@ -3813,7 +3686,7 @@
         </p:nvSpPr>
         <p:spPr>
           <a:xfrm>
-            <a:off x="5623560" y="2651760"/>
+            <a:off x="5532120" y="3127248"/>
             <a:ext cx="146304" cy="146304"/>
           </a:xfrm>
           <a:prstGeom prst="ellipse">
@@ -3833,8 +3706,8 @@
         </p:nvSpPr>
         <p:spPr>
           <a:xfrm>
-            <a:off x="5943600" y="2523744"/>
-            <a:ext cx="5669280" cy="411480"/>
+            <a:off x="5852160" y="2980944"/>
+            <a:ext cx="5760720" cy="411480"/>
           </a:xfrm>
           <a:prstGeom prst="rect">
             <a:avLst/>
@@ -3858,7 +3731,7 @@
                 <a:ea typeface="Yu Gothic" pitchFamily="34" charset="-122"/>
                 <a:cs typeface="Yu Gothic" pitchFamily="34" charset="-120"/>
               </a:rPr>
-              <a:t>公式記録の部活実績</a:t>
+              <a:t>部の実績・制服・倍率5年推移</a:t>
             </a:r>
             <a:endParaRPr lang="en-US" sz="1700" dirty="0"/>
           </a:p>
@@ -3872,24 +3745,24 @@
         </p:nvSpPr>
         <p:spPr>
           <a:xfrm>
-            <a:off x="5943600" y="2935224"/>
-            <a:ext cx="5669280" cy="640080"/>
-          </a:xfrm>
-          <a:prstGeom prst="rect">
-            <a:avLst/>
-          </a:prstGeom>
-          <a:noFill/>
-          <a:ln/>
-        </p:spPr>
-        <p:txBody>
-          <a:bodyPr wrap="square" lIns="0" tIns="0" rIns="0" bIns="0" rtlCol="0" anchor="ctr"/>
-          <a:lstStyle/>
-          <a:p>
-            <a:pPr indent="0" marL="0">
-              <a:buNone/>
-            </a:pPr>
-            <a:r>
-              <a:rPr lang="en-US" sz="1250" dirty="0">
+            <a:off x="5852160" y="3419856"/>
+            <a:ext cx="5760720" cy="731520"/>
+          </a:xfrm>
+          <a:prstGeom prst="rect">
+            <a:avLst/>
+          </a:prstGeom>
+          <a:noFill/>
+          <a:ln/>
+        </p:spPr>
+        <p:txBody>
+          <a:bodyPr wrap="square" lIns="0" tIns="0" rIns="0" bIns="0" rtlCol="0" anchor="ctr"/>
+          <a:lstStyle/>
+          <a:p>
+            <a:pPr indent="0" marL="0">
+              <a:buNone/>
+            </a:pPr>
+            <a:r>
+              <a:rPr lang="en-US" sz="1350" dirty="0">
                 <a:solidFill>
                   <a:srgbClr val="5C6B84"/>
                 </a:solidFill>
@@ -3897,9 +3770,9 @@
                 <a:ea typeface="Yu Gothic" pitchFamily="34" charset="-122"/>
                 <a:cs typeface="Yu Gothic" pitchFamily="34" charset="-120"/>
               </a:rPr>
-              <a:t>都高体連・高野連・吹奏楽連盟・美術展の記録から、部の実績として掲載（個人名なし）</a:t>
-            </a:r>
-            <a:endParaRPr lang="en-US" sz="1250" dirty="0"/>
+              <a:t>公式記録から集めた部の実績や、本人が気にする制服も同じ紙の上に</a:t>
+            </a:r>
+            <a:endParaRPr lang="en-US" sz="1350" dirty="0"/>
           </a:p>
         </p:txBody>
       </p:sp>
@@ -3911,7 +3784,7 @@
         </p:nvSpPr>
         <p:spPr>
           <a:xfrm>
-            <a:off x="5623560" y="3685032"/>
+            <a:off x="5532120" y="4498848"/>
             <a:ext cx="146304" cy="146304"/>
           </a:xfrm>
           <a:prstGeom prst="ellipse">
@@ -3931,8 +3804,8 @@
         </p:nvSpPr>
         <p:spPr>
           <a:xfrm>
-            <a:off x="5943600" y="3557016"/>
-            <a:ext cx="5669280" cy="411480"/>
+            <a:off x="5852160" y="4352544"/>
+            <a:ext cx="5760720" cy="411480"/>
           </a:xfrm>
           <a:prstGeom prst="rect">
             <a:avLst/>
@@ -3956,7 +3829,7 @@
                 <a:ea typeface="Yu Gothic" pitchFamily="34" charset="-122"/>
                 <a:cs typeface="Yu Gothic" pitchFamily="34" charset="-120"/>
               </a:rPr>
-              <a:t>制服・倍率5年推移・学校の言葉</a:t>
+              <a:t>A4で印刷できる</a:t>
             </a:r>
             <a:endParaRPr lang="en-US" sz="1700" dirty="0"/>
           </a:p>
@@ -3970,24 +3843,24 @@
         </p:nvSpPr>
         <p:spPr>
           <a:xfrm>
-            <a:off x="5943600" y="3968496"/>
-            <a:ext cx="5669280" cy="640080"/>
-          </a:xfrm>
-          <a:prstGeom prst="rect">
-            <a:avLst/>
-          </a:prstGeom>
-          <a:noFill/>
-          <a:ln/>
-        </p:spPr>
-        <p:txBody>
-          <a:bodyPr wrap="square" lIns="0" tIns="0" rIns="0" bIns="0" rtlCol="0" anchor="ctr"/>
-          <a:lstStyle/>
-          <a:p>
-            <a:pPr indent="0" marL="0">
-              <a:buNone/>
-            </a:pPr>
-            <a:r>
-              <a:rPr lang="en-US" sz="1250" dirty="0">
+            <a:off x="5852160" y="4791456"/>
+            <a:ext cx="5760720" cy="731520"/>
+          </a:xfrm>
+          <a:prstGeom prst="rect">
+            <a:avLst/>
+          </a:prstGeom>
+          <a:noFill/>
+          <a:ln/>
+        </p:spPr>
+        <p:txBody>
+          <a:bodyPr wrap="square" lIns="0" tIns="0" rIns="0" bIns="0" rtlCol="0" anchor="ctr"/>
+          <a:lstStyle/>
+          <a:p>
+            <a:pPr indent="0" marL="0">
+              <a:buNone/>
+            </a:pPr>
+            <a:r>
+              <a:rPr lang="en-US" sz="1350" dirty="0">
                 <a:solidFill>
                   <a:srgbClr val="5C6B84"/>
                 </a:solidFill>
@@ -3995,107 +3868,48 @@
                 <a:ea typeface="Yu Gothic" pitchFamily="34" charset="-122"/>
                 <a:cs typeface="Yu Gothic" pitchFamily="34" charset="-120"/>
               </a:rPr>
-              <a:t>本人が気になる情報も1枚に。出典は全項目に明記</a:t>
-            </a:r>
-            <a:endParaRPr lang="en-US" sz="1250" dirty="0"/>
-          </a:p>
-        </p:txBody>
-      </p:sp>
-      <p:sp>
-        <p:nvSpPr>
-          <p:cNvPr id="13" name="Shape 10"/>
-          <p:cNvSpPr/>
-          <p:nvPr/>
-        </p:nvSpPr>
-        <p:spPr>
-          <a:xfrm>
-            <a:off x="5623560" y="4718304"/>
-            <a:ext cx="146304" cy="146304"/>
-          </a:xfrm>
-          <a:prstGeom prst="ellipse">
-            <a:avLst/>
-          </a:prstGeom>
-          <a:solidFill>
-            <a:srgbClr val="A87F2F"/>
-          </a:solidFill>
-          <a:ln/>
-        </p:spPr>
-      </p:sp>
-      <p:sp>
-        <p:nvSpPr>
-          <p:cNvPr id="14" name="Text 11"/>
-          <p:cNvSpPr/>
-          <p:nvPr/>
-        </p:nvSpPr>
-        <p:spPr>
-          <a:xfrm>
-            <a:off x="5943600" y="4590288"/>
-            <a:ext cx="5669280" cy="411480"/>
-          </a:xfrm>
-          <a:prstGeom prst="rect">
-            <a:avLst/>
-          </a:prstGeom>
-          <a:noFill/>
-          <a:ln/>
-        </p:spPr>
-        <p:txBody>
-          <a:bodyPr wrap="square" lIns="0" tIns="0" rIns="0" bIns="0" rtlCol="0" anchor="ctr"/>
-          <a:lstStyle/>
-          <a:p>
-            <a:pPr indent="0" marL="0">
-              <a:buNone/>
-            </a:pPr>
-            <a:r>
-              <a:rPr lang="en-US" sz="1700" b="1" dirty="0">
-                <a:solidFill>
-                  <a:srgbClr val="1A2333"/>
-                </a:solidFill>
-                <a:latin typeface="Yu Gothic" pitchFamily="34" charset="0"/>
-                <a:ea typeface="Yu Gothic" pitchFamily="34" charset="-122"/>
-                <a:cs typeface="Yu Gothic" pitchFamily="34" charset="-120"/>
-              </a:rPr>
-              <a:t>A4印刷対応</a:t>
-            </a:r>
-            <a:endParaRPr lang="en-US" sz="1700" dirty="0"/>
-          </a:p>
-        </p:txBody>
-      </p:sp>
-      <p:sp>
-        <p:nvSpPr>
-          <p:cNvPr id="15" name="Text 12"/>
-          <p:cNvSpPr/>
-          <p:nvPr/>
-        </p:nvSpPr>
-        <p:spPr>
-          <a:xfrm>
-            <a:off x="5943600" y="5001768"/>
-            <a:ext cx="5669280" cy="640080"/>
-          </a:xfrm>
-          <a:prstGeom prst="rect">
-            <a:avLst/>
-          </a:prstGeom>
-          <a:noFill/>
-          <a:ln/>
-        </p:spPr>
-        <p:txBody>
-          <a:bodyPr wrap="square" lIns="0" tIns="0" rIns="0" bIns="0" rtlCol="0" anchor="ctr"/>
-          <a:lstStyle/>
-          <a:p>
-            <a:pPr indent="0" marL="0">
-              <a:buNone/>
-            </a:pPr>
-            <a:r>
-              <a:rPr lang="en-US" sz="1250" dirty="0">
-                <a:solidFill>
-                  <a:srgbClr val="5C6B84"/>
-                </a:solidFill>
-                <a:latin typeface="Yu Gothic" pitchFamily="34" charset="0"/>
-                <a:ea typeface="Yu Gothic" pitchFamily="34" charset="-122"/>
-                <a:cs typeface="Yu Gothic" pitchFamily="34" charset="-120"/>
-              </a:rPr>
-              <a:t>印刷して学校説明会や家族会議へ</a:t>
-            </a:r>
-            <a:endParaRPr lang="en-US" sz="1250" dirty="0"/>
+              <a:t>学校説明会や見学に持っていき、家族で話すための紙になります</a:t>
+            </a:r>
+            <a:endParaRPr lang="en-US" sz="1350" dirty="0"/>
+          </a:p>
+        </p:txBody>
+      </p:sp>
+      <p:sp>
+        <p:nvSpPr>
+          <p:cNvPr id="13" name="Text 10"/>
+          <p:cNvSpPr/>
+          <p:nvPr/>
+        </p:nvSpPr>
+        <p:spPr>
+          <a:xfrm>
+            <a:off x="5852160" y="5943600"/>
+            <a:ext cx="5760720" cy="457200"/>
+          </a:xfrm>
+          <a:prstGeom prst="rect">
+            <a:avLst/>
+          </a:prstGeom>
+          <a:noFill/>
+          <a:ln/>
+        </p:spPr>
+        <p:txBody>
+          <a:bodyPr wrap="square" lIns="0" tIns="0" rIns="0" bIns="0" rtlCol="0" anchor="ctr"/>
+          <a:lstStyle/>
+          <a:p>
+            <a:pPr indent="0" marL="0">
+              <a:buNone/>
+            </a:pPr>
+            <a:r>
+              <a:rPr lang="en-US" sz="1400" b="1" dirty="0">
+                <a:solidFill>
+                  <a:srgbClr val="A87F2F"/>
+                </a:solidFill>
+                <a:latin typeface="Yu Gothic" pitchFamily="34" charset="0"/>
+                <a:ea typeface="Yu Gothic" pitchFamily="34" charset="-122"/>
+                <a:cs typeface="Yu Gothic" pitchFamily="34" charset="-120"/>
+              </a:rPr>
+              <a:t>画面の中で完結させません。入り口の次は、実際に学校を見に行く番です。</a:t>
+            </a:r>
+            <a:endParaRPr lang="en-US" sz="1400" dirty="0"/>
           </a:p>
         </p:txBody>
       </p:sp>
@@ -4139,8 +3953,8 @@
         </p:nvSpPr>
         <p:spPr>
           <a:xfrm>
-            <a:off x="640080" y="502920"/>
-            <a:ext cx="10972800" cy="731520"/>
+            <a:off x="640080" y="457200"/>
+            <a:ext cx="10972800" cy="777240"/>
           </a:xfrm>
           <a:prstGeom prst="rect">
             <a:avLst/>
@@ -4164,7 +3978,7 @@
                 <a:ea typeface="Yu Gothic" pitchFamily="34" charset="-122"/>
                 <a:cs typeface="Yu Gothic" pitchFamily="34" charset="-120"/>
               </a:rPr>
-              <a:t>出典を示せるデータだけで作る</a:t>
+              <a:t>9つの公開データを、ひとつの判断に</a:t>
             </a:r>
             <a:endParaRPr lang="en-US" sz="3200" dirty="0"/>
           </a:p>
@@ -4178,12 +3992,12 @@
         </p:nvSpPr>
         <p:spPr>
           <a:xfrm>
-            <a:off x="640080" y="1463040"/>
-            <a:ext cx="3429000" cy="804672"/>
+            <a:off x="640080" y="1417320"/>
+            <a:ext cx="3429000" cy="777240"/>
           </a:xfrm>
           <a:prstGeom prst="roundRect">
             <a:avLst>
-              <a:gd name="adj" fmla="val 9091"/>
+              <a:gd name="adj" fmla="val 9412"/>
             </a:avLst>
           </a:prstGeom>
           <a:solidFill>
@@ -4205,7 +4019,7 @@
         </p:nvSpPr>
         <p:spPr>
           <a:xfrm>
-            <a:off x="841248" y="1536192"/>
+            <a:off x="841248" y="1490472"/>
             <a:ext cx="3108960" cy="365760"/>
           </a:xfrm>
           <a:prstGeom prst="rect">
@@ -4244,7 +4058,7 @@
         </p:nvSpPr>
         <p:spPr>
           <a:xfrm>
-            <a:off x="841248" y="1883664"/>
+            <a:off x="841248" y="1828800"/>
             <a:ext cx="3108960" cy="320040"/>
           </a:xfrm>
           <a:prstGeom prst="rect">
@@ -4269,7 +4083,7 @@
                 <a:ea typeface="Yu Gothic" pitchFamily="34" charset="-122"/>
                 <a:cs typeface="Yu Gothic" pitchFamily="34" charset="-120"/>
               </a:rPr>
-              <a:t>都教委 オープンデータ</a:t>
+              <a:t>東京都教育委員会</a:t>
             </a:r>
             <a:endParaRPr lang="en-US" sz="1050" dirty="0"/>
           </a:p>
@@ -4283,12 +4097,12 @@
         </p:nvSpPr>
         <p:spPr>
           <a:xfrm>
-            <a:off x="4389120" y="1463040"/>
-            <a:ext cx="3429000" cy="804672"/>
+            <a:off x="4389120" y="1417320"/>
+            <a:ext cx="3429000" cy="777240"/>
           </a:xfrm>
           <a:prstGeom prst="roundRect">
             <a:avLst>
-              <a:gd name="adj" fmla="val 9091"/>
+              <a:gd name="adj" fmla="val 9412"/>
             </a:avLst>
           </a:prstGeom>
           <a:solidFill>
@@ -4310,7 +4124,7 @@
         </p:nvSpPr>
         <p:spPr>
           <a:xfrm>
-            <a:off x="4590288" y="1536192"/>
+            <a:off x="4590288" y="1490472"/>
             <a:ext cx="3108960" cy="365760"/>
           </a:xfrm>
           <a:prstGeom prst="rect">
@@ -4349,7 +4163,7 @@
         </p:nvSpPr>
         <p:spPr>
           <a:xfrm>
-            <a:off x="4590288" y="1883664"/>
+            <a:off x="4590288" y="1828800"/>
             <a:ext cx="3108960" cy="320040"/>
           </a:xfrm>
           <a:prstGeom prst="rect">
@@ -4374,7 +4188,7 @@
                 <a:ea typeface="Yu Gothic" pitchFamily="34" charset="-122"/>
                 <a:cs typeface="Yu Gothic" pitchFamily="34" charset="-120"/>
               </a:rPr>
-              <a:t>都教委 応募状況</a:t>
+              <a:t>東京都教育委員会</a:t>
             </a:r>
             <a:endParaRPr lang="en-US" sz="1050" dirty="0"/>
           </a:p>
@@ -4388,12 +4202,12 @@
         </p:nvSpPr>
         <p:spPr>
           <a:xfrm>
-            <a:off x="8138160" y="1463040"/>
-            <a:ext cx="3429000" cy="804672"/>
+            <a:off x="8138160" y="1417320"/>
+            <a:ext cx="3429000" cy="777240"/>
           </a:xfrm>
           <a:prstGeom prst="roundRect">
             <a:avLst>
-              <a:gd name="adj" fmla="val 9091"/>
+              <a:gd name="adj" fmla="val 9412"/>
             </a:avLst>
           </a:prstGeom>
           <a:solidFill>
@@ -4415,7 +4229,7 @@
         </p:nvSpPr>
         <p:spPr>
           <a:xfrm>
-            <a:off x="8339328" y="1536192"/>
+            <a:off x="8339328" y="1490472"/>
             <a:ext cx="3108960" cy="365760"/>
           </a:xfrm>
           <a:prstGeom prst="rect">
@@ -4440,7 +4254,7 @@
                 <a:ea typeface="Yu Gothic" pitchFamily="34" charset="-122"/>
                 <a:cs typeface="Yu Gothic" pitchFamily="34" charset="-120"/>
               </a:rPr>
-              <a:t>部活 約5,000件</a:t>
+              <a:t>中学校卒業者の進路状況</a:t>
             </a:r>
             <a:endParaRPr lang="en-US" sz="1350" dirty="0"/>
           </a:p>
@@ -4454,7 +4268,7 @@
         </p:nvSpPr>
         <p:spPr>
           <a:xfrm>
-            <a:off x="8339328" y="1883664"/>
+            <a:off x="8339328" y="1828800"/>
             <a:ext cx="3108960" cy="320040"/>
           </a:xfrm>
           <a:prstGeom prst="rect">
@@ -4479,7 +4293,7 @@
                 <a:ea typeface="Yu Gothic" pitchFamily="34" charset="-122"/>
                 <a:cs typeface="Yu Gothic" pitchFamily="34" charset="-120"/>
               </a:rPr>
-              <a:t>全189校の公式サイト</a:t>
+              <a:t>東京都教育委員会</a:t>
             </a:r>
             <a:endParaRPr lang="en-US" sz="1050" dirty="0"/>
           </a:p>
@@ -4493,12 +4307,12 @@
         </p:nvSpPr>
         <p:spPr>
           <a:xfrm>
-            <a:off x="640080" y="2450592"/>
-            <a:ext cx="3429000" cy="804672"/>
+            <a:off x="640080" y="2377440"/>
+            <a:ext cx="3429000" cy="777240"/>
           </a:xfrm>
           <a:prstGeom prst="roundRect">
             <a:avLst>
-              <a:gd name="adj" fmla="val 9091"/>
+              <a:gd name="adj" fmla="val 9412"/>
             </a:avLst>
           </a:prstGeom>
           <a:solidFill>
@@ -4520,7 +4334,7 @@
         </p:nvSpPr>
         <p:spPr>
           <a:xfrm>
-            <a:off x="841248" y="2523744"/>
+            <a:off x="841248" y="2450592"/>
             <a:ext cx="3108960" cy="365760"/>
           </a:xfrm>
           <a:prstGeom prst="rect">
@@ -4545,7 +4359,7 @@
                 <a:ea typeface="Yu Gothic" pitchFamily="34" charset="-122"/>
                 <a:cs typeface="Yu Gothic" pitchFamily="34" charset="-120"/>
               </a:rPr>
-              <a:t>運動部の実績</a:t>
+              <a:t>進学指導重点校等の指定</a:t>
             </a:r>
             <a:endParaRPr lang="en-US" sz="1350" dirty="0"/>
           </a:p>
@@ -4559,7 +4373,7 @@
         </p:nvSpPr>
         <p:spPr>
           <a:xfrm>
-            <a:off x="841248" y="2871216"/>
+            <a:off x="841248" y="2788920"/>
             <a:ext cx="3108960" cy="320040"/>
           </a:xfrm>
           <a:prstGeom prst="rect">
@@ -4584,7 +4398,7 @@
                 <a:ea typeface="Yu Gothic" pitchFamily="34" charset="-122"/>
                 <a:cs typeface="Yu Gothic" pitchFamily="34" charset="-120"/>
               </a:rPr>
-              <a:t>都高体連 公式記録</a:t>
+              <a:t>東京都教育委員会</a:t>
             </a:r>
             <a:endParaRPr lang="en-US" sz="1050" dirty="0"/>
           </a:p>
@@ -4598,12 +4412,12 @@
         </p:nvSpPr>
         <p:spPr>
           <a:xfrm>
-            <a:off x="4389120" y="2450592"/>
-            <a:ext cx="3429000" cy="804672"/>
+            <a:off x="4389120" y="2377440"/>
+            <a:ext cx="3429000" cy="777240"/>
           </a:xfrm>
           <a:prstGeom prst="roundRect">
             <a:avLst>
-              <a:gd name="adj" fmla="val 9091"/>
+              <a:gd name="adj" fmla="val 9412"/>
             </a:avLst>
           </a:prstGeom>
           <a:solidFill>
@@ -4625,7 +4439,7 @@
         </p:nvSpPr>
         <p:spPr>
           <a:xfrm>
-            <a:off x="4590288" y="2523744"/>
+            <a:off x="4590288" y="2450592"/>
             <a:ext cx="3108960" cy="365760"/>
           </a:xfrm>
           <a:prstGeom prst="rect">
@@ -4650,7 +4464,7 @@
                 <a:ea typeface="Yu Gothic" pitchFamily="34" charset="-122"/>
                 <a:cs typeface="Yu Gothic" pitchFamily="34" charset="-120"/>
               </a:rPr>
-              <a:t>硬式野球</a:t>
+              <a:t>部活 約5,000件</a:t>
             </a:r>
             <a:endParaRPr lang="en-US" sz="1350" dirty="0"/>
           </a:p>
@@ -4664,7 +4478,7 @@
         </p:nvSpPr>
         <p:spPr>
           <a:xfrm>
-            <a:off x="4590288" y="2871216"/>
+            <a:off x="4590288" y="2788920"/>
             <a:ext cx="3108960" cy="320040"/>
           </a:xfrm>
           <a:prstGeom prst="rect">
@@ -4689,7 +4503,7 @@
                 <a:ea typeface="Yu Gothic" pitchFamily="34" charset="-122"/>
                 <a:cs typeface="Yu Gothic" pitchFamily="34" charset="-120"/>
               </a:rPr>
-              <a:t>都高野連 試合結果</a:t>
+              <a:t>各校公式サイト</a:t>
             </a:r>
             <a:endParaRPr lang="en-US" sz="1050" dirty="0"/>
           </a:p>
@@ -4703,12 +4517,12 @@
         </p:nvSpPr>
         <p:spPr>
           <a:xfrm>
-            <a:off x="8138160" y="2450592"/>
-            <a:ext cx="3429000" cy="804672"/>
+            <a:off x="8138160" y="2377440"/>
+            <a:ext cx="3429000" cy="777240"/>
           </a:xfrm>
           <a:prstGeom prst="roundRect">
             <a:avLst>
-              <a:gd name="adj" fmla="val 9091"/>
+              <a:gd name="adj" fmla="val 9412"/>
             </a:avLst>
           </a:prstGeom>
           <a:solidFill>
@@ -4730,7 +4544,7 @@
         </p:nvSpPr>
         <p:spPr>
           <a:xfrm>
-            <a:off x="8339328" y="2523744"/>
+            <a:off x="8339328" y="2450592"/>
             <a:ext cx="3108960" cy="365760"/>
           </a:xfrm>
           <a:prstGeom prst="rect">
@@ -4755,7 +4569,7 @@
                 <a:ea typeface="Yu Gothic" pitchFamily="34" charset="-122"/>
                 <a:cs typeface="Yu Gothic" pitchFamily="34" charset="-120"/>
               </a:rPr>
-              <a:t>吹奏楽</a:t>
+              <a:t>制服</a:t>
             </a:r>
             <a:endParaRPr lang="en-US" sz="1350" dirty="0"/>
           </a:p>
@@ -4769,7 +4583,7 @@
         </p:nvSpPr>
         <p:spPr>
           <a:xfrm>
-            <a:off x="8339328" y="2871216"/>
+            <a:off x="8339328" y="2788920"/>
             <a:ext cx="3108960" cy="320040"/>
           </a:xfrm>
           <a:prstGeom prst="rect">
@@ -4794,7 +4608,7 @@
                 <a:ea typeface="Yu Gothic" pitchFamily="34" charset="-122"/>
                 <a:cs typeface="Yu Gothic" pitchFamily="34" charset="-120"/>
               </a:rPr>
-              <a:t>都吹奏楽連盟 コンクール</a:t>
+              <a:t>各校公式サイト</a:t>
             </a:r>
             <a:endParaRPr lang="en-US" sz="1050" dirty="0"/>
           </a:p>
@@ -4808,12 +4622,12 @@
         </p:nvSpPr>
         <p:spPr>
           <a:xfrm>
-            <a:off x="640080" y="3438144"/>
-            <a:ext cx="3429000" cy="804672"/>
+            <a:off x="640080" y="3337560"/>
+            <a:ext cx="3429000" cy="777240"/>
           </a:xfrm>
           <a:prstGeom prst="roundRect">
             <a:avLst>
-              <a:gd name="adj" fmla="val 9091"/>
+              <a:gd name="adj" fmla="val 9412"/>
             </a:avLst>
           </a:prstGeom>
           <a:solidFill>
@@ -4835,7 +4649,7 @@
         </p:nvSpPr>
         <p:spPr>
           <a:xfrm>
-            <a:off x="841248" y="3511296"/>
+            <a:off x="841248" y="3410712"/>
             <a:ext cx="3108960" cy="365760"/>
           </a:xfrm>
           <a:prstGeom prst="rect">
@@ -4860,7 +4674,7 @@
                 <a:ea typeface="Yu Gothic" pitchFamily="34" charset="-122"/>
                 <a:cs typeface="Yu Gothic" pitchFamily="34" charset="-120"/>
               </a:rPr>
-              <a:t>美術・書道</a:t>
+              <a:t>運動部の実績</a:t>
             </a:r>
             <a:endParaRPr lang="en-US" sz="1350" dirty="0"/>
           </a:p>
@@ -4874,7 +4688,7 @@
         </p:nvSpPr>
         <p:spPr>
           <a:xfrm>
-            <a:off x="841248" y="3858768"/>
+            <a:off x="841248" y="3749040"/>
             <a:ext cx="3108960" cy="320040"/>
           </a:xfrm>
           <a:prstGeom prst="rect">
@@ -4899,7 +4713,7 @@
                 <a:ea typeface="Yu Gothic" pitchFamily="34" charset="-122"/>
                 <a:cs typeface="Yu Gothic" pitchFamily="34" charset="-120"/>
               </a:rPr>
-              <a:t>高校生国際美術展</a:t>
+              <a:t>東京都高体連</a:t>
             </a:r>
             <a:endParaRPr lang="en-US" sz="1050" dirty="0"/>
           </a:p>
@@ -4913,12 +4727,12 @@
         </p:nvSpPr>
         <p:spPr>
           <a:xfrm>
-            <a:off x="4389120" y="3438144"/>
-            <a:ext cx="3429000" cy="804672"/>
+            <a:off x="4389120" y="3337560"/>
+            <a:ext cx="3429000" cy="777240"/>
           </a:xfrm>
           <a:prstGeom prst="roundRect">
             <a:avLst>
-              <a:gd name="adj" fmla="val 9091"/>
+              <a:gd name="adj" fmla="val 9412"/>
             </a:avLst>
           </a:prstGeom>
           <a:solidFill>
@@ -4940,7 +4754,7 @@
         </p:nvSpPr>
         <p:spPr>
           <a:xfrm>
-            <a:off x="4590288" y="3511296"/>
+            <a:off x="4590288" y="3410712"/>
             <a:ext cx="3108960" cy="365760"/>
           </a:xfrm>
           <a:prstGeom prst="rect">
@@ -4965,7 +4779,7 @@
                 <a:ea typeface="Yu Gothic" pitchFamily="34" charset="-122"/>
                 <a:cs typeface="Yu Gothic" pitchFamily="34" charset="-120"/>
               </a:rPr>
-              <a:t>制服</a:t>
+              <a:t>硬式野球・吹奏楽・美術</a:t>
             </a:r>
             <a:endParaRPr lang="en-US" sz="1350" dirty="0"/>
           </a:p>
@@ -4979,7 +4793,7 @@
         </p:nvSpPr>
         <p:spPr>
           <a:xfrm>
-            <a:off x="4590288" y="3858768"/>
+            <a:off x="4590288" y="3749040"/>
             <a:ext cx="3108960" cy="320040"/>
           </a:xfrm>
           <a:prstGeom prst="rect">
@@ -5004,7 +4818,7 @@
                 <a:ea typeface="Yu Gothic" pitchFamily="34" charset="-122"/>
                 <a:cs typeface="Yu Gothic" pitchFamily="34" charset="-120"/>
               </a:rPr>
-              <a:t>各校公式サイト</a:t>
+              <a:t>都高野連・都吹連・国際美術展</a:t>
             </a:r>
             <a:endParaRPr lang="en-US" sz="1050" dirty="0"/>
           </a:p>
@@ -5018,12 +4832,12 @@
         </p:nvSpPr>
         <p:spPr>
           <a:xfrm>
-            <a:off x="8138160" y="3438144"/>
-            <a:ext cx="3429000" cy="804672"/>
+            <a:off x="8138160" y="3337560"/>
+            <a:ext cx="3429000" cy="777240"/>
           </a:xfrm>
           <a:prstGeom prst="roundRect">
             <a:avLst>
-              <a:gd name="adj" fmla="val 9091"/>
+              <a:gd name="adj" fmla="val 9412"/>
             </a:avLst>
           </a:prstGeom>
           <a:solidFill>
@@ -5045,7 +4859,7 @@
         </p:nvSpPr>
         <p:spPr>
           <a:xfrm>
-            <a:off x="8339328" y="3511296"/>
+            <a:off x="8339328" y="3410712"/>
             <a:ext cx="3108960" cy="365760"/>
           </a:xfrm>
           <a:prstGeom prst="rect">
@@ -5084,7 +4898,7 @@
         </p:nvSpPr>
         <p:spPr>
           <a:xfrm>
-            <a:off x="8339328" y="3858768"/>
+            <a:off x="8339328" y="3749040"/>
             <a:ext cx="3108960" cy="320040"/>
           </a:xfrm>
           <a:prstGeom prst="rect">
@@ -5109,7 +4923,7 @@
                 <a:ea typeface="Yu Gothic" pitchFamily="34" charset="-122"/>
                 <a:cs typeface="Yu Gothic" pitchFamily="34" charset="-120"/>
               </a:rPr>
-              <a:t>駅間グラフ自前計算</a:t>
+              <a:t>station_database（CC BY-SA 4.0）</a:t>
             </a:r>
             <a:endParaRPr lang="en-US" sz="1050" dirty="0"/>
           </a:p>
@@ -5123,7 +4937,152 @@
         </p:nvSpPr>
         <p:spPr>
           <a:xfrm>
-            <a:off x="640080" y="4617720"/>
+            <a:off x="640080" y="4434840"/>
+            <a:ext cx="10972800" cy="411480"/>
+          </a:xfrm>
+          <a:prstGeom prst="rect">
+            <a:avLst/>
+          </a:prstGeom>
+          <a:noFill/>
+          <a:ln/>
+        </p:spPr>
+        <p:txBody>
+          <a:bodyPr wrap="square" lIns="0" tIns="0" rIns="0" bIns="0" rtlCol="0" anchor="ctr"/>
+          <a:lstStyle/>
+          <a:p>
+            <a:pPr indent="0" marL="0">
+              <a:buNone/>
+            </a:pPr>
+            <a:r>
+              <a:rPr lang="en-US" sz="1400" dirty="0">
+                <a:solidFill>
+                  <a:srgbClr val="5C6B84"/>
+                </a:solidFill>
+                <a:latin typeface="Yu Gothic" pitchFamily="34" charset="0"/>
+                <a:ea typeface="Yu Gothic" pitchFamily="34" charset="-122"/>
+                <a:cs typeface="Yu Gothic" pitchFamily="34" charset="-120"/>
+              </a:rPr>
+              <a:t>PDF・HTML・表形式でバラバラだったものを、ひとつの画面に集めました。</a:t>
+            </a:r>
+            <a:endParaRPr lang="en-US" sz="1400" dirty="0"/>
+          </a:p>
+        </p:txBody>
+      </p:sp>
+      <p:sp>
+        <p:nvSpPr>
+          <p:cNvPr id="31" name="Text 29"/>
+          <p:cNvSpPr/>
+          <p:nvPr/>
+        </p:nvSpPr>
+        <p:spPr>
+          <a:xfrm>
+            <a:off x="640080" y="4937760"/>
+            <a:ext cx="10972800" cy="411480"/>
+          </a:xfrm>
+          <a:prstGeom prst="rect">
+            <a:avLst/>
+          </a:prstGeom>
+          <a:noFill/>
+          <a:ln/>
+        </p:spPr>
+        <p:txBody>
+          <a:bodyPr wrap="square" lIns="0" tIns="0" rIns="0" bIns="0" rtlCol="0" anchor="ctr"/>
+          <a:lstStyle/>
+          <a:p>
+            <a:pPr indent="0" marL="0">
+              <a:buNone/>
+            </a:pPr>
+            <a:r>
+              <a:rPr lang="en-US" sz="1400" b="1" dirty="0">
+                <a:solidFill>
+                  <a:srgbClr val="1A2333"/>
+                </a:solidFill>
+                <a:latin typeface="Yu Gothic" pitchFamily="34" charset="0"/>
+                <a:ea typeface="Yu Gothic" pitchFamily="34" charset="-122"/>
+                <a:cs typeface="Yu Gothic" pitchFamily="34" charset="-120"/>
+              </a:rPr>
+              <a:t>すべての表示に出典を付けています。</a:t>
+            </a:r>
+            <a:pPr indent="0" marL="0">
+              <a:buNone/>
+            </a:pPr>
+            <a:r>
+              <a:rPr lang="en-US" sz="1400" dirty="0">
+                <a:solidFill>
+                  <a:srgbClr val="5C6B84"/>
+                </a:solidFill>
+                <a:latin typeface="Yu Gothic" pitchFamily="34" charset="0"/>
+                <a:ea typeface="Yu Gothic" pitchFamily="34" charset="-122"/>
+                <a:cs typeface="Yu Gothic" pitchFamily="34" charset="-120"/>
+              </a:rPr>
+              <a:t>  気になった学校は、次に一次情報へ進めます。ここは入り口なので、行き止まりにしません。</a:t>
+            </a:r>
+            <a:endParaRPr lang="en-US" sz="1400" dirty="0"/>
+          </a:p>
+        </p:txBody>
+      </p:sp>
+      <p:sp>
+        <p:nvSpPr>
+          <p:cNvPr id="32" name="Text 30"/>
+          <p:cNvSpPr/>
+          <p:nvPr/>
+        </p:nvSpPr>
+        <p:spPr>
+          <a:xfrm>
+            <a:off x="640080" y="5440680"/>
+            <a:ext cx="10972800" cy="411480"/>
+          </a:xfrm>
+          <a:prstGeom prst="rect">
+            <a:avLst/>
+          </a:prstGeom>
+          <a:noFill/>
+          <a:ln/>
+        </p:spPr>
+        <p:txBody>
+          <a:bodyPr wrap="square" lIns="0" tIns="0" rIns="0" bIns="0" rtlCol="0" anchor="ctr"/>
+          <a:lstStyle/>
+          <a:p>
+            <a:pPr indent="0" marL="0">
+              <a:buNone/>
+            </a:pPr>
+            <a:r>
+              <a:rPr lang="en-US" sz="1400" b="1" dirty="0">
+                <a:solidFill>
+                  <a:srgbClr val="1A2333"/>
+                </a:solidFill>
+                <a:latin typeface="Yu Gothic" pitchFamily="34" charset="0"/>
+                <a:ea typeface="Yu Gothic" pitchFamily="34" charset="-122"/>
+                <a:cs typeface="Yu Gothic" pitchFamily="34" charset="-120"/>
+              </a:rPr>
+              <a:t>個人情報は集めません。</a:t>
+            </a:r>
+            <a:pPr indent="0" marL="0">
+              <a:buNone/>
+            </a:pPr>
+            <a:r>
+              <a:rPr lang="en-US" sz="1400" dirty="0">
+                <a:solidFill>
+                  <a:srgbClr val="5C6B84"/>
+                </a:solidFill>
+                <a:latin typeface="Yu Gothic" pitchFamily="34" charset="0"/>
+                <a:ea typeface="Yu Gothic" pitchFamily="34" charset="-122"/>
+                <a:cs typeface="Yu Gothic" pitchFamily="34" charset="-120"/>
+              </a:rPr>
+              <a:t>  大会実績は部の実績として扱い、生徒の氏名・学年・記録は収集の時点で読み取りません。</a:t>
+            </a:r>
+            <a:endParaRPr lang="en-US" sz="1400" dirty="0"/>
+          </a:p>
+        </p:txBody>
+      </p:sp>
+      <p:sp>
+        <p:nvSpPr>
+          <p:cNvPr id="33" name="Text 31"/>
+          <p:cNvSpPr/>
+          <p:nvPr/>
+        </p:nvSpPr>
+        <p:spPr>
+          <a:xfrm>
+            <a:off x="640080" y="6035040"/>
             <a:ext cx="10972800" cy="457200"/>
           </a:xfrm>
           <a:prstGeom prst="rect">
@@ -5140,113 +5099,7 @@
               <a:buNone/>
             </a:pPr>
             <a:r>
-              <a:rPr lang="en-US" sz="1300" b="1" dirty="0">
-                <a:solidFill>
-                  <a:srgbClr val="1A2333"/>
-                </a:solidFill>
-                <a:latin typeface="Yu Gothic" pitchFamily="34" charset="0"/>
-                <a:ea typeface="Yu Gothic" pitchFamily="34" charset="-122"/>
-                <a:cs typeface="Yu Gothic" pitchFamily="34" charset="-120"/>
-              </a:rPr>
-              <a:t>個人情報の扱い　</a:t>
-            </a:r>
-            <a:pPr indent="0" marL="0">
-              <a:buNone/>
-            </a:pPr>
-            <a:r>
-              <a:rPr lang="en-US" sz="1300" dirty="0">
-                <a:solidFill>
-                  <a:srgbClr val="5C6B84"/>
-                </a:solidFill>
-                <a:latin typeface="Yu Gothic" pitchFamily="34" charset="0"/>
-                <a:ea typeface="Yu Gothic" pitchFamily="34" charset="-122"/>
-                <a:cs typeface="Yu Gothic" pitchFamily="34" charset="-120"/>
-              </a:rPr>
-              <a:t>大会実績は部の実績として収集。生徒の氏名・学年・記録は収集の時点で読み取らず、列そのものを作りません。</a:t>
-            </a:r>
-            <a:endParaRPr lang="en-US" sz="1300" dirty="0"/>
-          </a:p>
-        </p:txBody>
-      </p:sp>
-      <p:sp>
-        <p:nvSpPr>
-          <p:cNvPr id="31" name="Text 29"/>
-          <p:cNvSpPr/>
-          <p:nvPr/>
-        </p:nvSpPr>
-        <p:spPr>
-          <a:xfrm>
-            <a:off x="640080" y="5166360"/>
-            <a:ext cx="10972800" cy="457200"/>
-          </a:xfrm>
-          <a:prstGeom prst="rect">
-            <a:avLst/>
-          </a:prstGeom>
-          <a:noFill/>
-          <a:ln/>
-        </p:spPr>
-        <p:txBody>
-          <a:bodyPr wrap="square" lIns="0" tIns="0" rIns="0" bIns="0" rtlCol="0" anchor="ctr"/>
-          <a:lstStyle/>
-          <a:p>
-            <a:pPr indent="0" marL="0">
-              <a:buNone/>
-            </a:pPr>
-            <a:r>
-              <a:rPr lang="en-US" sz="1300" b="1" dirty="0">
-                <a:solidFill>
-                  <a:srgbClr val="1A2333"/>
-                </a:solidFill>
-                <a:latin typeface="Yu Gothic" pitchFamily="34" charset="0"/>
-                <a:ea typeface="Yu Gothic" pitchFamily="34" charset="-122"/>
-                <a:cs typeface="Yu Gothic" pitchFamily="34" charset="-120"/>
-              </a:rPr>
-              <a:t>構成　</a:t>
-            </a:r>
-            <a:pPr indent="0" marL="0">
-              <a:buNone/>
-            </a:pPr>
-            <a:r>
-              <a:rPr lang="en-US" sz="1300" dirty="0">
-                <a:solidFill>
-                  <a:srgbClr val="5C6B84"/>
-                </a:solidFill>
-                <a:latin typeface="Yu Gothic" pitchFamily="34" charset="0"/>
-                <a:ea typeface="Yu Gothic" pitchFamily="34" charset="-122"/>
-                <a:cs typeface="Yu Gothic" pitchFamily="34" charset="-120"/>
-              </a:rPr>
-              <a:t>デモ: 単一HTML（GitHub Pages）／ API: Cloudflare Workers + D1 + Workers AI（Qwen3-30B）— 応答0.7〜1.3秒</a:t>
-            </a:r>
-            <a:endParaRPr lang="en-US" sz="1300" dirty="0"/>
-          </a:p>
-        </p:txBody>
-      </p:sp>
-      <p:sp>
-        <p:nvSpPr>
-          <p:cNvPr id="32" name="Text 30"/>
-          <p:cNvSpPr/>
-          <p:nvPr/>
-        </p:nvSpPr>
-        <p:spPr>
-          <a:xfrm>
-            <a:off x="640080" y="5806440"/>
-            <a:ext cx="10972800" cy="457200"/>
-          </a:xfrm>
-          <a:prstGeom prst="rect">
-            <a:avLst/>
-          </a:prstGeom>
-          <a:noFill/>
-          <a:ln/>
-        </p:spPr>
-        <p:txBody>
-          <a:bodyPr wrap="square" lIns="0" tIns="0" rIns="0" bIns="0" rtlCol="0" anchor="ctr"/>
-          <a:lstStyle/>
-          <a:p>
-            <a:pPr indent="0" marL="0">
-              <a:buNone/>
-            </a:pPr>
-            <a:r>
-              <a:rPr lang="en-US" sz="1500" b="1" dirty="0">
+              <a:rPr lang="en-US" sz="1600" b="1" dirty="0">
                 <a:solidFill>
                   <a:srgbClr val="A87F2F"/>
                 </a:solidFill>
@@ -5254,9 +5107,9 @@
                 <a:ea typeface="Yu Gothic" pitchFamily="34" charset="-122"/>
                 <a:cs typeface="Yu Gothic" pitchFamily="34" charset="-120"/>
               </a:rPr>
-              <a:t>すべての表示に出典を明記 — 出典を出せないデータは載せない、が開発ルール</a:t>
-            </a:r>
-            <a:endParaRPr lang="en-US" sz="1500" dirty="0"/>
+              <a:t>出典を出せないデータは載せない ——  開発中ずっと守ったルールです。</a:t>
+            </a:r>
+            <a:endParaRPr lang="en-US" sz="1600" dirty="0"/>
           </a:p>
         </p:txBody>
       </p:sp>
@@ -5301,7 +5154,7 @@
         <p:spPr>
           <a:xfrm>
             <a:off x="10149840" y="4846320"/>
-            <a:ext cx="3474720" cy="3474720"/>
+            <a:ext cx="3657600" cy="3657600"/>
           </a:xfrm>
           <a:prstGeom prst="ellipse">
             <a:avLst/>
@@ -5329,8 +5182,8 @@
         </p:nvSpPr>
         <p:spPr>
           <a:xfrm>
-            <a:off x="10636301" y="5332781"/>
-            <a:ext cx="2501798" cy="2501798"/>
+            <a:off x="10661904" y="5358384"/>
+            <a:ext cx="2633472" cy="2633472"/>
           </a:xfrm>
           <a:prstGeom prst="ellipse">
             <a:avLst/>
@@ -5358,8 +5211,8 @@
         </p:nvSpPr>
         <p:spPr>
           <a:xfrm>
-            <a:off x="11018520" y="5715000"/>
-            <a:ext cx="1737360" cy="1737360"/>
+            <a:off x="11064240" y="5760720"/>
+            <a:ext cx="1828800" cy="1828800"/>
           </a:xfrm>
           <a:prstGeom prst="ellipse">
             <a:avLst/>
@@ -5381,24 +5234,65 @@
       </p:sp>
       <p:sp>
         <p:nvSpPr>
-          <p:cNvPr id="5" name="Shape 3"/>
-          <p:cNvSpPr/>
-          <p:nvPr/>
-        </p:nvSpPr>
-        <p:spPr>
-          <a:xfrm>
-            <a:off x="10149840" y="6583680"/>
-            <a:ext cx="3474720" cy="0"/>
-          </a:xfrm>
-          <a:prstGeom prst="line">
-            <a:avLst/>
-          </a:prstGeom>
-          <a:noFill/>
-          <a:ln w="9525">
+          <p:cNvPr id="5" name="Text 3"/>
+          <p:cNvSpPr/>
+          <p:nvPr/>
+        </p:nvSpPr>
+        <p:spPr>
+          <a:xfrm>
+            <a:off x="640080" y="457200"/>
+            <a:ext cx="10972800" cy="777240"/>
+          </a:xfrm>
+          <a:prstGeom prst="rect">
+            <a:avLst/>
+          </a:prstGeom>
+          <a:noFill/>
+          <a:ln/>
+        </p:spPr>
+        <p:txBody>
+          <a:bodyPr wrap="square" lIns="0" tIns="0" rIns="0" bIns="0" rtlCol="0" anchor="ctr"/>
+          <a:lstStyle/>
+          <a:p>
+            <a:pPr indent="0" marL="0">
+              <a:buNone/>
+            </a:pPr>
+            <a:r>
+              <a:rPr lang="en-US" sz="3200" b="1" dirty="0">
+                <a:solidFill>
+                  <a:srgbClr val="F2F5FA"/>
+                </a:solidFill>
+                <a:latin typeface="Yu Gothic" pitchFamily="34" charset="0"/>
+                <a:ea typeface="Yu Gothic" pitchFamily="34" charset="-122"/>
+                <a:cs typeface="Yu Gothic" pitchFamily="34" charset="-120"/>
+              </a:rPr>
+              <a:t>チームと、これから</a:t>
+            </a:r>
+            <a:endParaRPr lang="en-US" sz="3200" dirty="0"/>
+          </a:p>
+        </p:txBody>
+      </p:sp>
+      <p:sp>
+        <p:nvSpPr>
+          <p:cNvPr id="6" name="Shape 4"/>
+          <p:cNvSpPr/>
+          <p:nvPr/>
+        </p:nvSpPr>
+        <p:spPr>
+          <a:xfrm>
+            <a:off x="640080" y="1417320"/>
+            <a:ext cx="3429000" cy="1965960"/>
+          </a:xfrm>
+          <a:prstGeom prst="roundRect">
+            <a:avLst>
+              <a:gd name="adj" fmla="val 5581"/>
+            </a:avLst>
+          </a:prstGeom>
+          <a:solidFill>
+            <a:srgbClr val="141B2A"/>
+          </a:solidFill>
+          <a:ln w="12700">
             <a:solidFill>
-              <a:srgbClr val="C9A85C">
-                <a:alpha val="10000"/>
-              </a:srgbClr>
+              <a:srgbClr val="2B3650"/>
             </a:solidFill>
             <a:prstDash val="solid"/>
           </a:ln>
@@ -5406,24 +5300,160 @@
       </p:sp>
       <p:sp>
         <p:nvSpPr>
-          <p:cNvPr id="6" name="Shape 4"/>
-          <p:cNvSpPr/>
-          <p:nvPr/>
-        </p:nvSpPr>
-        <p:spPr>
-          <a:xfrm>
-            <a:off x="11887200" y="4846320"/>
-            <a:ext cx="0" cy="3474720"/>
-          </a:xfrm>
-          <a:prstGeom prst="line">
-            <a:avLst/>
-          </a:prstGeom>
-          <a:noFill/>
-          <a:ln w="9525">
+          <p:cNvPr id="7" name="Text 5"/>
+          <p:cNvSpPr/>
+          <p:nvPr/>
+        </p:nvSpPr>
+        <p:spPr>
+          <a:xfrm>
+            <a:off x="896112" y="1600200"/>
+            <a:ext cx="2926080" cy="411480"/>
+          </a:xfrm>
+          <a:prstGeom prst="rect">
+            <a:avLst/>
+          </a:prstGeom>
+          <a:noFill/>
+          <a:ln/>
+        </p:spPr>
+        <p:txBody>
+          <a:bodyPr wrap="square" lIns="0" tIns="0" rIns="0" bIns="0" rtlCol="0" anchor="ctr"/>
+          <a:lstStyle/>
+          <a:p>
+            <a:pPr indent="0" marL="0">
+              <a:buNone/>
+            </a:pPr>
+            <a:r>
+              <a:rPr lang="en-US" sz="2000" b="1" dirty="0">
+                <a:solidFill>
+                  <a:srgbClr val="F2F5FA"/>
+                </a:solidFill>
+                <a:latin typeface="Yu Gothic" pitchFamily="34" charset="0"/>
+                <a:ea typeface="Yu Gothic" pitchFamily="34" charset="-122"/>
+                <a:cs typeface="Yu Gothic" pitchFamily="34" charset="-120"/>
+              </a:rPr>
+              <a:t>西</a:t>
+            </a:r>
+            <a:endParaRPr lang="en-US" sz="2000" dirty="0"/>
+          </a:p>
+        </p:txBody>
+      </p:sp>
+      <p:sp>
+        <p:nvSpPr>
+          <p:cNvPr id="8" name="Text 6"/>
+          <p:cNvSpPr/>
+          <p:nvPr/>
+        </p:nvSpPr>
+        <p:spPr>
+          <a:xfrm>
+            <a:off x="896112" y="2029968"/>
+            <a:ext cx="2926080" cy="320040"/>
+          </a:xfrm>
+          <a:prstGeom prst="rect">
+            <a:avLst/>
+          </a:prstGeom>
+          <a:noFill/>
+          <a:ln/>
+        </p:spPr>
+        <p:txBody>
+          <a:bodyPr wrap="square" lIns="0" tIns="0" rIns="0" bIns="0" rtlCol="0" anchor="ctr"/>
+          <a:lstStyle/>
+          <a:p>
+            <a:pPr indent="0" marL="0">
+              <a:buNone/>
+            </a:pPr>
+            <a:r>
+              <a:rPr lang="en-US" sz="1250" dirty="0">
+                <a:solidFill>
+                  <a:srgbClr val="C9A85C"/>
+                </a:solidFill>
+                <a:latin typeface="Yu Gothic" pitchFamily="34" charset="0"/>
+                <a:ea typeface="Yu Gothic" pitchFamily="34" charset="-122"/>
+                <a:cs typeface="Yu Gothic" pitchFamily="34" charset="-120"/>
+              </a:rPr>
+              <a:t>企画・データ整備</a:t>
+            </a:r>
+            <a:endParaRPr lang="en-US" sz="1250" dirty="0"/>
+          </a:p>
+        </p:txBody>
+      </p:sp>
+      <p:sp>
+        <p:nvSpPr>
+          <p:cNvPr id="9" name="Text 7"/>
+          <p:cNvSpPr/>
+          <p:nvPr/>
+        </p:nvSpPr>
+        <p:spPr>
+          <a:xfrm>
+            <a:off x="896112" y="2423160"/>
+            <a:ext cx="2926080" cy="822960"/>
+          </a:xfrm>
+          <a:prstGeom prst="rect">
+            <a:avLst/>
+          </a:prstGeom>
+          <a:noFill/>
+          <a:ln/>
+        </p:spPr>
+        <p:txBody>
+          <a:bodyPr wrap="square" lIns="0" tIns="0" rIns="0" bIns="0" rtlCol="0" anchor="ctr"/>
+          <a:lstStyle/>
+          <a:p>
+            <a:pPr indent="0" marL="0">
+              <a:buNone/>
+            </a:pPr>
+            <a:r>
+              <a:rPr lang="en-US" sz="1150" dirty="0">
+                <a:solidFill>
+                  <a:srgbClr val="93A1B9"/>
+                </a:solidFill>
+                <a:latin typeface="Yu Gothic" pitchFamily="34" charset="0"/>
+                <a:ea typeface="Yu Gothic" pitchFamily="34" charset="-122"/>
+                <a:cs typeface="Yu Gothic" pitchFamily="34" charset="-120"/>
+              </a:rPr>
+              <a:t>塾で保護者と面談している立場から、</a:t>
+            </a:r>
+            <a:endParaRPr lang="en-US" sz="1150" dirty="0"/>
+          </a:p>
+          <a:p>
+            <a:pPr indent="0" marL="0">
+              <a:buNone/>
+            </a:pPr>
+            <a:r>
+              <a:rPr lang="en-US" sz="1150" dirty="0">
+                <a:solidFill>
+                  <a:srgbClr val="93A1B9"/>
+                </a:solidFill>
+                <a:latin typeface="Yu Gothic" pitchFamily="34" charset="0"/>
+                <a:ea typeface="Yu Gothic" pitchFamily="34" charset="-122"/>
+                <a:cs typeface="Yu Gothic" pitchFamily="34" charset="-120"/>
+              </a:rPr>
+              <a:t>必要な情報と伝え方を決めています</a:t>
+            </a:r>
+            <a:endParaRPr lang="en-US" sz="1150" dirty="0"/>
+          </a:p>
+        </p:txBody>
+      </p:sp>
+      <p:sp>
+        <p:nvSpPr>
+          <p:cNvPr id="10" name="Shape 8"/>
+          <p:cNvSpPr/>
+          <p:nvPr/>
+        </p:nvSpPr>
+        <p:spPr>
+          <a:xfrm>
+            <a:off x="4389120" y="1417320"/>
+            <a:ext cx="3429000" cy="1965960"/>
+          </a:xfrm>
+          <a:prstGeom prst="roundRect">
+            <a:avLst>
+              <a:gd name="adj" fmla="val 5581"/>
+            </a:avLst>
+          </a:prstGeom>
+          <a:solidFill>
+            <a:srgbClr val="141B2A"/>
+          </a:solidFill>
+          <a:ln w="12700">
             <a:solidFill>
-              <a:srgbClr val="C9A85C">
-                <a:alpha val="10000"/>
-              </a:srgbClr>
+              <a:srgbClr val="2B3650"/>
             </a:solidFill>
             <a:prstDash val="solid"/>
           </a:ln>
@@ -5431,30 +5461,30 @@
       </p:sp>
       <p:sp>
         <p:nvSpPr>
-          <p:cNvPr id="7" name="Text 5"/>
-          <p:cNvSpPr/>
-          <p:nvPr/>
-        </p:nvSpPr>
-        <p:spPr>
-          <a:xfrm>
-            <a:off x="640080" y="502920"/>
-            <a:ext cx="10972800" cy="731520"/>
-          </a:xfrm>
-          <a:prstGeom prst="rect">
-            <a:avLst/>
-          </a:prstGeom>
-          <a:noFill/>
-          <a:ln/>
-        </p:spPr>
-        <p:txBody>
-          <a:bodyPr wrap="square" lIns="0" tIns="0" rIns="0" bIns="0" rtlCol="0" anchor="ctr"/>
-          <a:lstStyle/>
-          <a:p>
-            <a:pPr indent="0" marL="0">
-              <a:buNone/>
-            </a:pPr>
-            <a:r>
-              <a:rPr lang="en-US" sz="3200" b="1" dirty="0">
+          <p:cNvPr id="11" name="Text 9"/>
+          <p:cNvSpPr/>
+          <p:nvPr/>
+        </p:nvSpPr>
+        <p:spPr>
+          <a:xfrm>
+            <a:off x="4645152" y="1600200"/>
+            <a:ext cx="2926080" cy="411480"/>
+          </a:xfrm>
+          <a:prstGeom prst="rect">
+            <a:avLst/>
+          </a:prstGeom>
+          <a:noFill/>
+          <a:ln/>
+        </p:spPr>
+        <p:txBody>
+          <a:bodyPr wrap="square" lIns="0" tIns="0" rIns="0" bIns="0" rtlCol="0" anchor="ctr"/>
+          <a:lstStyle/>
+          <a:p>
+            <a:pPr indent="0" marL="0">
+              <a:buNone/>
+            </a:pPr>
+            <a:r>
+              <a:rPr lang="en-US" sz="2000" b="1" dirty="0">
                 <a:solidFill>
                   <a:srgbClr val="F2F5FA"/>
                 </a:solidFill>
@@ -5462,36 +5492,129 @@
                 <a:ea typeface="Yu Gothic" pitchFamily="34" charset="-122"/>
                 <a:cs typeface="Yu Gothic" pitchFamily="34" charset="-120"/>
               </a:rPr>
-              <a:t>これから広げること</a:t>
-            </a:r>
-            <a:endParaRPr lang="en-US" sz="3200" dirty="0"/>
-          </a:p>
-        </p:txBody>
-      </p:sp>
-      <p:sp>
-        <p:nvSpPr>
-          <p:cNvPr id="8" name="Shape 6"/>
-          <p:cNvSpPr/>
-          <p:nvPr/>
-        </p:nvSpPr>
-        <p:spPr>
-          <a:xfrm>
-            <a:off x="640080" y="1600200"/>
-            <a:ext cx="1234440" cy="457200"/>
+              <a:t>寒河江</a:t>
+            </a:r>
+            <a:endParaRPr lang="en-US" sz="2000" dirty="0"/>
+          </a:p>
+        </p:txBody>
+      </p:sp>
+      <p:sp>
+        <p:nvSpPr>
+          <p:cNvPr id="12" name="Text 10"/>
+          <p:cNvSpPr/>
+          <p:nvPr/>
+        </p:nvSpPr>
+        <p:spPr>
+          <a:xfrm>
+            <a:off x="4645152" y="2029968"/>
+            <a:ext cx="2926080" cy="320040"/>
+          </a:xfrm>
+          <a:prstGeom prst="rect">
+            <a:avLst/>
+          </a:prstGeom>
+          <a:noFill/>
+          <a:ln/>
+        </p:spPr>
+        <p:txBody>
+          <a:bodyPr wrap="square" lIns="0" tIns="0" rIns="0" bIns="0" rtlCol="0" anchor="ctr"/>
+          <a:lstStyle/>
+          <a:p>
+            <a:pPr indent="0" marL="0">
+              <a:buNone/>
+            </a:pPr>
+            <a:r>
+              <a:rPr lang="en-US" sz="1250" dirty="0">
+                <a:solidFill>
+                  <a:srgbClr val="C9A85C"/>
+                </a:solidFill>
+                <a:latin typeface="Yu Gothic" pitchFamily="34" charset="0"/>
+                <a:ea typeface="Yu Gothic" pitchFamily="34" charset="-122"/>
+                <a:cs typeface="Yu Gothic" pitchFamily="34" charset="-120"/>
+              </a:rPr>
+              <a:t>推薦ロジック・API</a:t>
+            </a:r>
+            <a:endParaRPr lang="en-US" sz="1250" dirty="0"/>
+          </a:p>
+        </p:txBody>
+      </p:sp>
+      <p:sp>
+        <p:nvSpPr>
+          <p:cNvPr id="13" name="Text 11"/>
+          <p:cNvSpPr/>
+          <p:nvPr/>
+        </p:nvSpPr>
+        <p:spPr>
+          <a:xfrm>
+            <a:off x="4645152" y="2423160"/>
+            <a:ext cx="2926080" cy="822960"/>
+          </a:xfrm>
+          <a:prstGeom prst="rect">
+            <a:avLst/>
+          </a:prstGeom>
+          <a:noFill/>
+          <a:ln/>
+        </p:spPr>
+        <p:txBody>
+          <a:bodyPr wrap="square" lIns="0" tIns="0" rIns="0" bIns="0" rtlCol="0" anchor="ctr"/>
+          <a:lstStyle/>
+          <a:p>
+            <a:pPr indent="0" marL="0">
+              <a:buNone/>
+            </a:pPr>
+            <a:r>
+              <a:rPr lang="en-US" sz="1150" dirty="0">
+                <a:solidFill>
+                  <a:srgbClr val="93A1B9"/>
+                </a:solidFill>
+                <a:latin typeface="Yu Gothic" pitchFamily="34" charset="0"/>
+                <a:ea typeface="Yu Gothic" pitchFamily="34" charset="-122"/>
+                <a:cs typeface="Yu Gothic" pitchFamily="34" charset="-120"/>
+              </a:rPr>
+              <a:t>圏の判定と重視軸、Cloudflare上の</a:t>
+            </a:r>
+            <a:endParaRPr lang="en-US" sz="1150" dirty="0"/>
+          </a:p>
+          <a:p>
+            <a:pPr indent="0" marL="0">
+              <a:buNone/>
+            </a:pPr>
+            <a:r>
+              <a:rPr lang="en-US" sz="1150" dirty="0">
+                <a:solidFill>
+                  <a:srgbClr val="93A1B9"/>
+                </a:solidFill>
+                <a:latin typeface="Yu Gothic" pitchFamily="34" charset="0"/>
+                <a:ea typeface="Yu Gothic" pitchFamily="34" charset="-122"/>
+                <a:cs typeface="Yu Gothic" pitchFamily="34" charset="-120"/>
+              </a:rPr>
+              <a:t>検索APIを担当</a:t>
+            </a:r>
+            <a:endParaRPr lang="en-US" sz="1150" dirty="0"/>
+          </a:p>
+        </p:txBody>
+      </p:sp>
+      <p:sp>
+        <p:nvSpPr>
+          <p:cNvPr id="14" name="Shape 12"/>
+          <p:cNvSpPr/>
+          <p:nvPr/>
+        </p:nvSpPr>
+        <p:spPr>
+          <a:xfrm>
+            <a:off x="8138160" y="1417320"/>
+            <a:ext cx="3429000" cy="1965960"/>
           </a:xfrm>
           <a:prstGeom prst="roundRect">
             <a:avLst>
-              <a:gd name="adj" fmla="val 50000"/>
+              <a:gd name="adj" fmla="val 5581"/>
             </a:avLst>
           </a:prstGeom>
           <a:solidFill>
-            <a:srgbClr val="0B101C">
-              <a:alpha val="0"/>
-            </a:srgbClr>
+            <a:srgbClr val="141B2A"/>
           </a:solidFill>
-          <a:ln w="19050">
+          <a:ln w="12700">
             <a:solidFill>
-              <a:srgbClr val="C9A85C"/>
+              <a:srgbClr val="2B3650"/>
             </a:solidFill>
             <a:prstDash val="solid"/>
           </a:ln>
@@ -5499,495 +5622,314 @@
       </p:sp>
       <p:sp>
         <p:nvSpPr>
-          <p:cNvPr id="9" name="Text 7"/>
-          <p:cNvSpPr/>
-          <p:nvPr/>
-        </p:nvSpPr>
-        <p:spPr>
-          <a:xfrm>
-            <a:off x="640080" y="1600200"/>
-            <a:ext cx="1234440" cy="457200"/>
-          </a:xfrm>
-          <a:prstGeom prst="rect">
-            <a:avLst/>
-          </a:prstGeom>
-          <a:noFill/>
-          <a:ln/>
-        </p:spPr>
-        <p:txBody>
-          <a:bodyPr wrap="square" lIns="0" tIns="0" rIns="0" bIns="0" rtlCol="0" anchor="ctr"/>
-          <a:lstStyle/>
-          <a:p>
-            <a:pPr algn="ctr" indent="0" marL="0">
+          <p:cNvPr id="15" name="Text 13"/>
+          <p:cNvSpPr/>
+          <p:nvPr/>
+        </p:nvSpPr>
+        <p:spPr>
+          <a:xfrm>
+            <a:off x="8394192" y="1600200"/>
+            <a:ext cx="2926080" cy="411480"/>
+          </a:xfrm>
+          <a:prstGeom prst="rect">
+            <a:avLst/>
+          </a:prstGeom>
+          <a:noFill/>
+          <a:ln/>
+        </p:spPr>
+        <p:txBody>
+          <a:bodyPr wrap="square" lIns="0" tIns="0" rIns="0" bIns="0" rtlCol="0" anchor="ctr"/>
+          <a:lstStyle/>
+          <a:p>
+            <a:pPr indent="0" marL="0">
+              <a:buNone/>
+            </a:pPr>
+            <a:r>
+              <a:rPr lang="en-US" sz="2000" b="1" dirty="0">
+                <a:solidFill>
+                  <a:srgbClr val="F2F5FA"/>
+                </a:solidFill>
+                <a:latin typeface="Yu Gothic" pitchFamily="34" charset="0"/>
+                <a:ea typeface="Yu Gothic" pitchFamily="34" charset="-122"/>
+                <a:cs typeface="Yu Gothic" pitchFamily="34" charset="-120"/>
+              </a:rPr>
+              <a:t>安田</a:t>
+            </a:r>
+            <a:endParaRPr lang="en-US" sz="2000" dirty="0"/>
+          </a:p>
+        </p:txBody>
+      </p:sp>
+      <p:sp>
+        <p:nvSpPr>
+          <p:cNvPr id="16" name="Text 14"/>
+          <p:cNvSpPr/>
+          <p:nvPr/>
+        </p:nvSpPr>
+        <p:spPr>
+          <a:xfrm>
+            <a:off x="8394192" y="2029968"/>
+            <a:ext cx="2926080" cy="320040"/>
+          </a:xfrm>
+          <a:prstGeom prst="rect">
+            <a:avLst/>
+          </a:prstGeom>
+          <a:noFill/>
+          <a:ln/>
+        </p:spPr>
+        <p:txBody>
+          <a:bodyPr wrap="square" lIns="0" tIns="0" rIns="0" bIns="0" rtlCol="0" anchor="ctr"/>
+          <a:lstStyle/>
+          <a:p>
+            <a:pPr indent="0" marL="0">
+              <a:buNone/>
+            </a:pPr>
+            <a:r>
+              <a:rPr lang="en-US" sz="1250" dirty="0">
+                <a:solidFill>
+                  <a:srgbClr val="C9A85C"/>
+                </a:solidFill>
+                <a:latin typeface="Yu Gothic" pitchFamily="34" charset="0"/>
+                <a:ea typeface="Yu Gothic" pitchFamily="34" charset="-122"/>
+                <a:cs typeface="Yu Gothic" pitchFamily="34" charset="-120"/>
+              </a:rPr>
+              <a:t>UI・画面設計</a:t>
+            </a:r>
+            <a:endParaRPr lang="en-US" sz="1250" dirty="0"/>
+          </a:p>
+        </p:txBody>
+      </p:sp>
+      <p:sp>
+        <p:nvSpPr>
+          <p:cNvPr id="17" name="Text 15"/>
+          <p:cNvSpPr/>
+          <p:nvPr/>
+        </p:nvSpPr>
+        <p:spPr>
+          <a:xfrm>
+            <a:off x="8394192" y="2423160"/>
+            <a:ext cx="2926080" cy="822960"/>
+          </a:xfrm>
+          <a:prstGeom prst="rect">
+            <a:avLst/>
+          </a:prstGeom>
+          <a:noFill/>
+          <a:ln/>
+        </p:spPr>
+        <p:txBody>
+          <a:bodyPr wrap="square" lIns="0" tIns="0" rIns="0" bIns="0" rtlCol="0" anchor="ctr"/>
+          <a:lstStyle/>
+          <a:p>
+            <a:pPr indent="0" marL="0">
+              <a:buNone/>
+            </a:pPr>
+            <a:r>
+              <a:rPr lang="en-US" sz="1150" dirty="0">
+                <a:solidFill>
+                  <a:srgbClr val="93A1B9"/>
+                </a:solidFill>
+                <a:latin typeface="Yu Gothic" pitchFamily="34" charset="0"/>
+                <a:ea typeface="Yu Gothic" pitchFamily="34" charset="-122"/>
+                <a:cs typeface="Yu Gothic" pitchFamily="34" charset="-120"/>
+              </a:rPr>
+              <a:t>保護者が迷わない画面と、</a:t>
+            </a:r>
+            <a:endParaRPr lang="en-US" sz="1150" dirty="0"/>
+          </a:p>
+          <a:p>
+            <a:pPr indent="0" marL="0">
+              <a:buNone/>
+            </a:pPr>
+            <a:r>
+              <a:rPr lang="en-US" sz="1150" dirty="0">
+                <a:solidFill>
+                  <a:srgbClr val="93A1B9"/>
+                </a:solidFill>
+                <a:latin typeface="Yu Gothic" pitchFamily="34" charset="0"/>
+                <a:ea typeface="Yu Gothic" pitchFamily="34" charset="-122"/>
+                <a:cs typeface="Yu Gothic" pitchFamily="34" charset="-120"/>
+              </a:rPr>
+              <a:t>持ち出せるシートの設計</a:t>
+            </a:r>
+            <a:endParaRPr lang="en-US" sz="1150" dirty="0"/>
+          </a:p>
+        </p:txBody>
+      </p:sp>
+      <p:sp>
+        <p:nvSpPr>
+          <p:cNvPr id="18" name="Text 16"/>
+          <p:cNvSpPr/>
+          <p:nvPr/>
+        </p:nvSpPr>
+        <p:spPr>
+          <a:xfrm>
+            <a:off x="640080" y="3611880"/>
+            <a:ext cx="10972800" cy="822960"/>
+          </a:xfrm>
+          <a:prstGeom prst="rect">
+            <a:avLst/>
+          </a:prstGeom>
+          <a:noFill/>
+          <a:ln/>
+        </p:spPr>
+        <p:txBody>
+          <a:bodyPr wrap="square" lIns="0" tIns="0" rIns="0" bIns="0" rtlCol="0" anchor="ctr"/>
+          <a:lstStyle/>
+          <a:p>
+            <a:pPr indent="0" marL="0">
               <a:buNone/>
             </a:pPr>
             <a:r>
               <a:rPr lang="en-US" sz="1300" b="1" dirty="0">
                 <a:solidFill>
+                  <a:srgbClr val="F2F5FA"/>
+                </a:solidFill>
+                <a:latin typeface="Yu Gothic" pitchFamily="34" charset="0"/>
+                <a:ea typeface="Yu Gothic" pitchFamily="34" charset="-122"/>
+                <a:cs typeface="Yu Gothic" pitchFamily="34" charset="-120"/>
+              </a:rPr>
+              <a:t>つくり方　</a:t>
+            </a:r>
+            <a:pPr indent="0" marL="0">
+              <a:buNone/>
+            </a:pPr>
+            <a:r>
+              <a:rPr lang="en-US" sz="1300" dirty="0">
+                <a:solidFill>
+                  <a:srgbClr val="93A1B9"/>
+                </a:solidFill>
+                <a:latin typeface="Yu Gothic" pitchFamily="34" charset="0"/>
+                <a:ea typeface="Yu Gothic" pitchFamily="34" charset="-122"/>
+                <a:cs typeface="Yu Gothic" pitchFamily="34" charset="-120"/>
+              </a:rPr>
+              <a:t>デモは依存のない単一HTML（どの端末でも確実に開く）。検索APIは Cloudflare Workers + D1。</a:t>
+            </a:r>
+            <a:endParaRPr lang="en-US" sz="1300" dirty="0"/>
+          </a:p>
+          <a:p>
+            <a:pPr indent="0" marL="0">
+              <a:buNone/>
+            </a:pPr>
+            <a:r>
+              <a:rPr lang="en-US" sz="1300" dirty="0">
+                <a:solidFill>
+                  <a:srgbClr val="93A1B9"/>
+                </a:solidFill>
+                <a:latin typeface="Yu Gothic" pitchFamily="34" charset="0"/>
+                <a:ea typeface="Yu Gothic" pitchFamily="34" charset="-122"/>
+                <a:cs typeface="Yu Gothic" pitchFamily="34" charset="-120"/>
+              </a:rPr>
+              <a:t>通学時間は駅間グラフから10.5万通りを事前計算し、急行運転で補正。回帰テスト29項目で品質を保っています。</a:t>
+            </a:r>
+            <a:endParaRPr lang="en-US" sz="1300" dirty="0"/>
+          </a:p>
+        </p:txBody>
+      </p:sp>
+      <p:sp>
+        <p:nvSpPr>
+          <p:cNvPr id="19" name="Text 17"/>
+          <p:cNvSpPr/>
+          <p:nvPr/>
+        </p:nvSpPr>
+        <p:spPr>
+          <a:xfrm>
+            <a:off x="640080" y="4572000"/>
+            <a:ext cx="10972800" cy="822960"/>
+          </a:xfrm>
+          <a:prstGeom prst="rect">
+            <a:avLst/>
+          </a:prstGeom>
+          <a:noFill/>
+          <a:ln/>
+        </p:spPr>
+        <p:txBody>
+          <a:bodyPr wrap="square" lIns="0" tIns="0" rIns="0" bIns="0" rtlCol="0" anchor="ctr"/>
+          <a:lstStyle/>
+          <a:p>
+            <a:pPr indent="0" marL="0">
+              <a:buNone/>
+            </a:pPr>
+            <a:r>
+              <a:rPr lang="en-US" sz="1300" b="1" dirty="0">
+                <a:solidFill>
+                  <a:srgbClr val="F2F5FA"/>
+                </a:solidFill>
+                <a:latin typeface="Yu Gothic" pitchFamily="34" charset="0"/>
+                <a:ea typeface="Yu Gothic" pitchFamily="34" charset="-122"/>
+                <a:cs typeface="Yu Gothic" pitchFamily="34" charset="-120"/>
+              </a:rPr>
+              <a:t>続け方　</a:t>
+            </a:r>
+            <a:pPr indent="0" marL="0">
+              <a:buNone/>
+            </a:pPr>
+            <a:r>
+              <a:rPr lang="en-US" sz="1300" dirty="0">
+                <a:solidFill>
+                  <a:srgbClr val="93A1B9"/>
+                </a:solidFill>
+                <a:latin typeface="Yu Gothic" pitchFamily="34" charset="0"/>
+                <a:ea typeface="Yu Gothic" pitchFamily="34" charset="-122"/>
+                <a:cs typeface="Yu Gothic" pitchFamily="34" charset="-120"/>
+              </a:rPr>
+              <a:t>データ更新はスクリプトとGitHub Actionsで自動化済み。年1回の入試制度の改定に少人数で追随できます。</a:t>
+            </a:r>
+            <a:endParaRPr lang="en-US" sz="1300" dirty="0"/>
+          </a:p>
+          <a:p>
+            <a:pPr indent="0" marL="0">
+              <a:buNone/>
+            </a:pPr>
+            <a:r>
+              <a:rPr lang="en-US" sz="1300" dirty="0">
+                <a:solidFill>
+                  <a:srgbClr val="93A1B9"/>
+                </a:solidFill>
+                <a:latin typeface="Yu Gothic" pitchFamily="34" charset="0"/>
+                <a:ea typeface="Yu Gothic" pitchFamily="34" charset="-122"/>
+                <a:cs typeface="Yu Gothic" pitchFamily="34" charset="-120"/>
+              </a:rPr>
+              <a:t>サーバーレス構成のため運用費は月数百円規模。次は私立高校への対応、口コミ・校風、やさしい日本語と多言語へ。</a:t>
+            </a:r>
+            <a:endParaRPr lang="en-US" sz="1300" dirty="0"/>
+          </a:p>
+        </p:txBody>
+      </p:sp>
+      <p:sp>
+        <p:nvSpPr>
+          <p:cNvPr id="20" name="Text 18"/>
+          <p:cNvSpPr/>
+          <p:nvPr/>
+        </p:nvSpPr>
+        <p:spPr>
+          <a:xfrm>
+            <a:off x="640080" y="5852160"/>
+            <a:ext cx="10972800" cy="548640"/>
+          </a:xfrm>
+          <a:prstGeom prst="rect">
+            <a:avLst/>
+          </a:prstGeom>
+          <a:noFill/>
+          <a:ln/>
+        </p:spPr>
+        <p:txBody>
+          <a:bodyPr wrap="square" lIns="0" tIns="0" rIns="0" bIns="0" rtlCol="0" anchor="ctr"/>
+          <a:lstStyle/>
+          <a:p>
+            <a:pPr indent="0" marL="0">
+              <a:buNone/>
+            </a:pPr>
+            <a:r>
+              <a:rPr lang="en-US" sz="2100" b="1" dirty="0">
+                <a:solidFill>
                   <a:srgbClr val="C9A85C"/>
                 </a:solidFill>
                 <a:latin typeface="Yu Gothic" pitchFamily="34" charset="0"/>
                 <a:ea typeface="Yu Gothic" pitchFamily="34" charset="-122"/>
                 <a:cs typeface="Yu Gothic" pitchFamily="34" charset="-120"/>
               </a:rPr>
-              <a:t>いま</a:t>
-            </a:r>
-            <a:endParaRPr lang="en-US" sz="1300" dirty="0"/>
-          </a:p>
-        </p:txBody>
-      </p:sp>
-      <p:sp>
-        <p:nvSpPr>
-          <p:cNvPr id="10" name="Text 8"/>
-          <p:cNvSpPr/>
-          <p:nvPr/>
-        </p:nvSpPr>
-        <p:spPr>
-          <a:xfrm>
-            <a:off x="2148840" y="1554480"/>
-            <a:ext cx="9144000" cy="457200"/>
-          </a:xfrm>
-          <a:prstGeom prst="rect">
-            <a:avLst/>
-          </a:prstGeom>
-          <a:noFill/>
-          <a:ln/>
-        </p:spPr>
-        <p:txBody>
-          <a:bodyPr wrap="square" lIns="0" tIns="0" rIns="0" bIns="0" rtlCol="0" anchor="ctr"/>
-          <a:lstStyle/>
-          <a:p>
-            <a:pPr indent="0" marL="0">
-              <a:buNone/>
-            </a:pPr>
-            <a:r>
-              <a:rPr lang="en-US" sz="1900" b="1" dirty="0">
-                <a:solidFill>
-                  <a:srgbClr val="F2F5FA"/>
-                </a:solidFill>
-                <a:latin typeface="Yu Gothic" pitchFamily="34" charset="0"/>
-                <a:ea typeface="Yu Gothic" pitchFamily="34" charset="-122"/>
-                <a:cs typeface="Yu Gothic" pitchFamily="34" charset="-120"/>
-              </a:rPr>
-              <a:t>都立189校＋高専</a:t>
-            </a:r>
-            <a:endParaRPr lang="en-US" sz="1900" dirty="0"/>
-          </a:p>
-        </p:txBody>
-      </p:sp>
-      <p:sp>
-        <p:nvSpPr>
-          <p:cNvPr id="11" name="Text 9"/>
-          <p:cNvSpPr/>
-          <p:nvPr/>
-        </p:nvSpPr>
-        <p:spPr>
-          <a:xfrm>
-            <a:off x="2148840" y="2011680"/>
-            <a:ext cx="9144000" cy="548640"/>
-          </a:xfrm>
-          <a:prstGeom prst="rect">
-            <a:avLst/>
-          </a:prstGeom>
-          <a:noFill/>
-          <a:ln/>
-        </p:spPr>
-        <p:txBody>
-          <a:bodyPr wrap="square" lIns="0" tIns="0" rIns="0" bIns="0" rtlCol="0" anchor="ctr"/>
-          <a:lstStyle/>
-          <a:p>
-            <a:pPr indent="0" marL="0">
-              <a:buNone/>
-            </a:pPr>
-            <a:r>
-              <a:rPr lang="en-US" sz="1300" dirty="0">
-                <a:solidFill>
-                  <a:srgbClr val="93A1B9"/>
-                </a:solidFill>
-                <a:latin typeface="Yu Gothic" pitchFamily="34" charset="0"/>
-                <a:ea typeface="Yu Gothic" pitchFamily="34" charset="-122"/>
-                <a:cs typeface="Yu Gothic" pitchFamily="34" charset="-120"/>
-              </a:rPr>
-              <a:t>対話・3圏の提案・重視軸・部活/制服/実績・くらべるシート</a:t>
-            </a:r>
-            <a:endParaRPr lang="en-US" sz="1300" dirty="0"/>
-          </a:p>
-        </p:txBody>
-      </p:sp>
-      <p:sp>
-        <p:nvSpPr>
-          <p:cNvPr id="12" name="Shape 10"/>
-          <p:cNvSpPr/>
-          <p:nvPr/>
-        </p:nvSpPr>
-        <p:spPr>
-          <a:xfrm>
-            <a:off x="1252728" y="2103120"/>
-            <a:ext cx="0" cy="868680"/>
-          </a:xfrm>
-          <a:prstGeom prst="line">
-            <a:avLst/>
-          </a:prstGeom>
-          <a:noFill/>
-          <a:ln w="19050">
-            <a:solidFill>
-              <a:srgbClr val="2B3650"/>
-            </a:solidFill>
-            <a:prstDash val="dash"/>
-          </a:ln>
-        </p:spPr>
-      </p:sp>
-      <p:sp>
-        <p:nvSpPr>
-          <p:cNvPr id="13" name="Shape 11"/>
-          <p:cNvSpPr/>
-          <p:nvPr/>
-        </p:nvSpPr>
-        <p:spPr>
-          <a:xfrm>
-            <a:off x="640080" y="2971800"/>
-            <a:ext cx="1234440" cy="457200"/>
-          </a:xfrm>
-          <a:prstGeom prst="roundRect">
-            <a:avLst>
-              <a:gd name="adj" fmla="val 50000"/>
-            </a:avLst>
-          </a:prstGeom>
-          <a:solidFill>
-            <a:srgbClr val="0B101C">
-              <a:alpha val="0"/>
-            </a:srgbClr>
-          </a:solidFill>
-          <a:ln w="19050">
-            <a:solidFill>
-              <a:srgbClr val="8FA8C8"/>
-            </a:solidFill>
-            <a:prstDash val="solid"/>
-          </a:ln>
-        </p:spPr>
-      </p:sp>
-      <p:sp>
-        <p:nvSpPr>
-          <p:cNvPr id="14" name="Text 12"/>
-          <p:cNvSpPr/>
-          <p:nvPr/>
-        </p:nvSpPr>
-        <p:spPr>
-          <a:xfrm>
-            <a:off x="640080" y="2971800"/>
-            <a:ext cx="1234440" cy="457200"/>
-          </a:xfrm>
-          <a:prstGeom prst="rect">
-            <a:avLst/>
-          </a:prstGeom>
-          <a:noFill/>
-          <a:ln/>
-        </p:spPr>
-        <p:txBody>
-          <a:bodyPr wrap="square" lIns="0" tIns="0" rIns="0" bIns="0" rtlCol="0" anchor="ctr"/>
-          <a:lstStyle/>
-          <a:p>
-            <a:pPr algn="ctr" indent="0" marL="0">
-              <a:buNone/>
-            </a:pPr>
-            <a:r>
-              <a:rPr lang="en-US" sz="1300" b="1" dirty="0">
-                <a:solidFill>
-                  <a:srgbClr val="8FA8C8"/>
-                </a:solidFill>
-                <a:latin typeface="Yu Gothic" pitchFamily="34" charset="0"/>
-                <a:ea typeface="Yu Gothic" pitchFamily="34" charset="-122"/>
-                <a:cs typeface="Yu Gothic" pitchFamily="34" charset="-120"/>
-              </a:rPr>
-              <a:t>次に</a:t>
-            </a:r>
-            <a:endParaRPr lang="en-US" sz="1300" dirty="0"/>
-          </a:p>
-        </p:txBody>
-      </p:sp>
-      <p:sp>
-        <p:nvSpPr>
-          <p:cNvPr id="15" name="Text 13"/>
-          <p:cNvSpPr/>
-          <p:nvPr/>
-        </p:nvSpPr>
-        <p:spPr>
-          <a:xfrm>
-            <a:off x="2148840" y="2926080"/>
-            <a:ext cx="9144000" cy="457200"/>
-          </a:xfrm>
-          <a:prstGeom prst="rect">
-            <a:avLst/>
-          </a:prstGeom>
-          <a:noFill/>
-          <a:ln/>
-        </p:spPr>
-        <p:txBody>
-          <a:bodyPr wrap="square" lIns="0" tIns="0" rIns="0" bIns="0" rtlCol="0" anchor="ctr"/>
-          <a:lstStyle/>
-          <a:p>
-            <a:pPr indent="0" marL="0">
-              <a:buNone/>
-            </a:pPr>
-            <a:r>
-              <a:rPr lang="en-US" sz="1900" b="1" dirty="0">
-                <a:solidFill>
-                  <a:srgbClr val="F2F5FA"/>
-                </a:solidFill>
-                <a:latin typeface="Yu Gothic" pitchFamily="34" charset="0"/>
-                <a:ea typeface="Yu Gothic" pitchFamily="34" charset="-122"/>
-                <a:cs typeface="Yu Gothic" pitchFamily="34" charset="-120"/>
-              </a:rPr>
-              <a:t>選択肢を広げる</a:t>
-            </a:r>
-            <a:endParaRPr lang="en-US" sz="1900" dirty="0"/>
-          </a:p>
-        </p:txBody>
-      </p:sp>
-      <p:sp>
-        <p:nvSpPr>
-          <p:cNvPr id="16" name="Text 14"/>
-          <p:cNvSpPr/>
-          <p:nvPr/>
-        </p:nvSpPr>
-        <p:spPr>
-          <a:xfrm>
-            <a:off x="2148840" y="3383280"/>
-            <a:ext cx="9144000" cy="548640"/>
-          </a:xfrm>
-          <a:prstGeom prst="rect">
-            <a:avLst/>
-          </a:prstGeom>
-          <a:noFill/>
-          <a:ln/>
-        </p:spPr>
-        <p:txBody>
-          <a:bodyPr wrap="square" lIns="0" tIns="0" rIns="0" bIns="0" rtlCol="0" anchor="ctr"/>
-          <a:lstStyle/>
-          <a:p>
-            <a:pPr indent="0" marL="0">
-              <a:buNone/>
-            </a:pPr>
-            <a:r>
-              <a:rPr lang="en-US" sz="1300" dirty="0">
-                <a:solidFill>
-                  <a:srgbClr val="93A1B9"/>
-                </a:solidFill>
-                <a:latin typeface="Yu Gothic" pitchFamily="34" charset="0"/>
-                <a:ea typeface="Yu Gothic" pitchFamily="34" charset="-122"/>
-                <a:cs typeface="Yu Gothic" pitchFamily="34" charset="-120"/>
-              </a:rPr>
-              <a:t>私立高校への対応 ／ 口コミ・校風データ ／ 実ダイヤに基づく通学時間 ／ ESAT-J・説明会日程</a:t>
-            </a:r>
-            <a:endParaRPr lang="en-US" sz="1300" dirty="0"/>
-          </a:p>
-        </p:txBody>
-      </p:sp>
-      <p:sp>
-        <p:nvSpPr>
-          <p:cNvPr id="17" name="Shape 15"/>
-          <p:cNvSpPr/>
-          <p:nvPr/>
-        </p:nvSpPr>
-        <p:spPr>
-          <a:xfrm>
-            <a:off x="1252728" y="3474720"/>
-            <a:ext cx="0" cy="868680"/>
-          </a:xfrm>
-          <a:prstGeom prst="line">
-            <a:avLst/>
-          </a:prstGeom>
-          <a:noFill/>
-          <a:ln w="19050">
-            <a:solidFill>
-              <a:srgbClr val="2B3650"/>
-            </a:solidFill>
-            <a:prstDash val="dash"/>
-          </a:ln>
-        </p:spPr>
-      </p:sp>
-      <p:sp>
-        <p:nvSpPr>
-          <p:cNvPr id="18" name="Shape 16"/>
-          <p:cNvSpPr/>
-          <p:nvPr/>
-        </p:nvSpPr>
-        <p:spPr>
-          <a:xfrm>
-            <a:off x="640080" y="4343400"/>
-            <a:ext cx="1234440" cy="457200"/>
-          </a:xfrm>
-          <a:prstGeom prst="roundRect">
-            <a:avLst>
-              <a:gd name="adj" fmla="val 50000"/>
-            </a:avLst>
-          </a:prstGeom>
-          <a:solidFill>
-            <a:srgbClr val="0B101C">
-              <a:alpha val="0"/>
-            </a:srgbClr>
-          </a:solidFill>
-          <a:ln w="19050">
-            <a:solidFill>
-              <a:srgbClr val="6C7A93"/>
-            </a:solidFill>
-            <a:prstDash val="solid"/>
-          </a:ln>
-        </p:spPr>
-      </p:sp>
-      <p:sp>
-        <p:nvSpPr>
-          <p:cNvPr id="19" name="Text 17"/>
-          <p:cNvSpPr/>
-          <p:nvPr/>
-        </p:nvSpPr>
-        <p:spPr>
-          <a:xfrm>
-            <a:off x="640080" y="4343400"/>
-            <a:ext cx="1234440" cy="457200"/>
-          </a:xfrm>
-          <a:prstGeom prst="rect">
-            <a:avLst/>
-          </a:prstGeom>
-          <a:noFill/>
-          <a:ln/>
-        </p:spPr>
-        <p:txBody>
-          <a:bodyPr wrap="square" lIns="0" tIns="0" rIns="0" bIns="0" rtlCol="0" anchor="ctr"/>
-          <a:lstStyle/>
-          <a:p>
-            <a:pPr algn="ctr" indent="0" marL="0">
-              <a:buNone/>
-            </a:pPr>
-            <a:r>
-              <a:rPr lang="en-US" sz="1300" b="1" dirty="0">
-                <a:solidFill>
-                  <a:srgbClr val="6C7A93"/>
-                </a:solidFill>
-                <a:latin typeface="Yu Gothic" pitchFamily="34" charset="0"/>
-                <a:ea typeface="Yu Gothic" pitchFamily="34" charset="-122"/>
-                <a:cs typeface="Yu Gothic" pitchFamily="34" charset="-120"/>
-              </a:rPr>
-              <a:t>その先</a:t>
-            </a:r>
-            <a:endParaRPr lang="en-US" sz="1300" dirty="0"/>
-          </a:p>
-        </p:txBody>
-      </p:sp>
-      <p:sp>
-        <p:nvSpPr>
-          <p:cNvPr id="20" name="Text 18"/>
-          <p:cNvSpPr/>
-          <p:nvPr/>
-        </p:nvSpPr>
-        <p:spPr>
-          <a:xfrm>
-            <a:off x="2148840" y="4297680"/>
-            <a:ext cx="9144000" cy="457200"/>
-          </a:xfrm>
-          <a:prstGeom prst="rect">
-            <a:avLst/>
-          </a:prstGeom>
-          <a:noFill/>
-          <a:ln/>
-        </p:spPr>
-        <p:txBody>
-          <a:bodyPr wrap="square" lIns="0" tIns="0" rIns="0" bIns="0" rtlCol="0" anchor="ctr"/>
-          <a:lstStyle/>
-          <a:p>
-            <a:pPr indent="0" marL="0">
-              <a:buNone/>
-            </a:pPr>
-            <a:r>
-              <a:rPr lang="en-US" sz="1900" b="1" dirty="0">
-                <a:solidFill>
-                  <a:srgbClr val="F2F5FA"/>
-                </a:solidFill>
-                <a:latin typeface="Yu Gothic" pitchFamily="34" charset="0"/>
-                <a:ea typeface="Yu Gothic" pitchFamily="34" charset="-122"/>
-                <a:cs typeface="Yu Gothic" pitchFamily="34" charset="-120"/>
-              </a:rPr>
-              <a:t>みんなで育てる</a:t>
-            </a:r>
-            <a:endParaRPr lang="en-US" sz="1900" dirty="0"/>
-          </a:p>
-        </p:txBody>
-      </p:sp>
-      <p:sp>
-        <p:nvSpPr>
-          <p:cNvPr id="21" name="Text 19"/>
-          <p:cNvSpPr/>
-          <p:nvPr/>
-        </p:nvSpPr>
-        <p:spPr>
-          <a:xfrm>
-            <a:off x="2148840" y="4754880"/>
-            <a:ext cx="9144000" cy="548640"/>
-          </a:xfrm>
-          <a:prstGeom prst="rect">
-            <a:avLst/>
-          </a:prstGeom>
-          <a:noFill/>
-          <a:ln/>
-        </p:spPr>
-        <p:txBody>
-          <a:bodyPr wrap="square" lIns="0" tIns="0" rIns="0" bIns="0" rtlCol="0" anchor="ctr"/>
-          <a:lstStyle/>
-          <a:p>
-            <a:pPr indent="0" marL="0">
-              <a:buNone/>
-            </a:pPr>
-            <a:r>
-              <a:rPr lang="en-US" sz="1300" dirty="0">
-                <a:solidFill>
-                  <a:srgbClr val="93A1B9"/>
-                </a:solidFill>
-                <a:latin typeface="Yu Gothic" pitchFamily="34" charset="0"/>
-                <a:ea typeface="Yu Gothic" pitchFamily="34" charset="-122"/>
-                <a:cs typeface="Yu Gothic" pitchFamily="34" charset="-120"/>
-              </a:rPr>
-              <a:t>学校からの情報更新窓口 ／ やさしい日本語・多言語対応 ／ 志望校の変化を追う「マイコンパス」</a:t>
-            </a:r>
-            <a:endParaRPr lang="en-US" sz="1300" dirty="0"/>
-          </a:p>
-        </p:txBody>
-      </p:sp>
-      <p:sp>
-        <p:nvSpPr>
-          <p:cNvPr id="22" name="Text 20"/>
-          <p:cNvSpPr/>
-          <p:nvPr/>
-        </p:nvSpPr>
-        <p:spPr>
-          <a:xfrm>
-            <a:off x="640080" y="5897880"/>
-            <a:ext cx="10972800" cy="548640"/>
-          </a:xfrm>
-          <a:prstGeom prst="rect">
-            <a:avLst/>
-          </a:prstGeom>
-          <a:noFill/>
-          <a:ln/>
-        </p:spPr>
-        <p:txBody>
-          <a:bodyPr wrap="square" lIns="0" tIns="0" rIns="0" bIns="0" rtlCol="0" anchor="ctr"/>
-          <a:lstStyle/>
-          <a:p>
-            <a:pPr indent="0" marL="0">
-              <a:buNone/>
-            </a:pPr>
-            <a:r>
-              <a:rPr lang="en-US" sz="2000" b="1" dirty="0">
-                <a:solidFill>
-                  <a:srgbClr val="C9A85C"/>
-                </a:solidFill>
-                <a:latin typeface="Yu Gothic" pitchFamily="34" charset="0"/>
-                <a:ea typeface="Yu Gothic" pitchFamily="34" charset="-122"/>
-                <a:cs typeface="Yu Gothic" pitchFamily="34" charset="-120"/>
-              </a:rPr>
               <a:t>迷子にならない進路選びを、東京のすべての家庭に。</a:t>
             </a:r>
-            <a:endParaRPr lang="en-US" sz="2000" dirty="0"/>
+            <a:endParaRPr lang="en-US" sz="2100" dirty="0"/>
           </a:p>
         </p:txBody>
       </p:sp>
